--- a/pptx_sessions_8_22/第14回_基礎編_受講者用.pptx
+++ b/pptx_sessions_8_22/第14回_基礎編_受講者用.pptx
@@ -1531,7 +1531,9 @@
           </a:ln>
         </p:spPr>
         <p:txBody>
-          <a:bodyPr/>
+          <a:bodyPr wrap="square">
+            <a:normAutofit/>
+          </a:bodyPr>
           <a:p/>
         </p:txBody>
       </p:sp>
@@ -1560,7 +1562,9 @@
           </a:ln>
         </p:spPr>
         <p:txBody>
-          <a:bodyPr/>
+          <a:bodyPr wrap="square">
+            <a:normAutofit/>
+          </a:bodyPr>
           <a:p/>
         </p:txBody>
       </p:sp>
@@ -1582,7 +1586,9 @@
           <a:ln/>
         </p:spPr>
         <p:txBody>
-          <a:bodyPr wrap="square" rtlCol="0" anchor="ctr"/>
+          <a:bodyPr wrap="square" rtlCol="0" anchor="ctr">
+            <a:normAutofit/>
+          </a:bodyPr>
           <a:lstStyle/>
           <a:p>
             <a:pPr algn="ctr" indent="0" marL="0">
@@ -1621,7 +1627,9 @@
           <a:ln/>
         </p:spPr>
         <p:txBody>
-          <a:bodyPr wrap="square" rtlCol="0" anchor="ctr"/>
+          <a:bodyPr wrap="square" rtlCol="0" anchor="ctr">
+            <a:normAutofit/>
+          </a:bodyPr>
           <a:lstStyle/>
           <a:p>
             <a:pPr algn="ctr" indent="0" marL="0">
@@ -1660,7 +1668,9 @@
           <a:ln/>
         </p:spPr>
         <p:txBody>
-          <a:bodyPr wrap="square" rtlCol="0" anchor="ctr"/>
+          <a:bodyPr wrap="square" rtlCol="0" anchor="ctr">
+            <a:normAutofit/>
+          </a:bodyPr>
           <a:lstStyle/>
           <a:p>
             <a:pPr algn="ctr" indent="0" marL="0">
@@ -1699,7 +1709,9 @@
           <a:ln/>
         </p:spPr>
         <p:txBody>
-          <a:bodyPr wrap="square" rtlCol="0" anchor="ctr"/>
+          <a:bodyPr wrap="square" rtlCol="0" anchor="ctr">
+            <a:normAutofit/>
+          </a:bodyPr>
           <a:lstStyle/>
           <a:p>
             <a:pPr algn="ctr" indent="0" marL="0">
@@ -1747,7 +1759,9 @@
           </a:ln>
         </p:spPr>
         <p:txBody>
-          <a:bodyPr/>
+          <a:bodyPr wrap="square">
+            <a:normAutofit/>
+          </a:bodyPr>
           <a:p/>
         </p:txBody>
       </p:sp>
@@ -1769,7 +1783,9 @@
           <a:ln/>
         </p:spPr>
         <p:txBody>
-          <a:bodyPr wrap="square" rtlCol="0" anchor="ctr"/>
+          <a:bodyPr wrap="square" rtlCol="0" anchor="ctr">
+            <a:normAutofit/>
+          </a:bodyPr>
           <a:lstStyle/>
           <a:p>
             <a:pPr algn="ctr" indent="0" marL="0">
@@ -1840,7 +1856,9 @@
           </a:ln>
         </p:spPr>
         <p:txBody>
-          <a:bodyPr/>
+          <a:bodyPr wrap="square">
+            <a:normAutofit/>
+          </a:bodyPr>
           <a:p/>
         </p:txBody>
       </p:sp>
@@ -1869,7 +1887,9 @@
           </a:ln>
         </p:spPr>
         <p:txBody>
-          <a:bodyPr/>
+          <a:bodyPr wrap="square">
+            <a:normAutofit/>
+          </a:bodyPr>
           <a:p/>
         </p:txBody>
       </p:sp>
@@ -1891,7 +1911,9 @@
           <a:ln/>
         </p:spPr>
         <p:txBody>
-          <a:bodyPr wrap="square" rtlCol="0" anchor="ctr"/>
+          <a:bodyPr wrap="square" rtlCol="0" anchor="ctr">
+            <a:normAutofit/>
+          </a:bodyPr>
           <a:lstStyle/>
           <a:p>
             <a:pPr indent="0" marL="0">
@@ -1930,7 +1952,9 @@
           <a:ln/>
         </p:spPr>
         <p:txBody>
-          <a:bodyPr wrap="square" rtlCol="0" anchor="ctr"/>
+          <a:bodyPr wrap="square" rtlCol="0" anchor="ctr">
+            <a:normAutofit/>
+          </a:bodyPr>
           <a:lstStyle/>
           <a:p>
             <a:pPr indent="0" marL="0">
@@ -1978,7 +2002,9 @@
           </a:ln>
         </p:spPr>
         <p:txBody>
-          <a:bodyPr/>
+          <a:bodyPr wrap="square">
+            <a:normAutofit/>
+          </a:bodyPr>
           <a:p/>
         </p:txBody>
       </p:sp>
@@ -2000,7 +2026,9 @@
           <a:ln/>
         </p:spPr>
         <p:txBody>
-          <a:bodyPr wrap="square" rtlCol="0" anchor="ctr"/>
+          <a:bodyPr wrap="square" rtlCol="0" anchor="ctr">
+            <a:normAutofit/>
+          </a:bodyPr>
           <a:lstStyle/>
           <a:p>
             <a:pPr indent="0" marL="0">
@@ -2039,7 +2067,9 @@
           <a:ln/>
         </p:spPr>
         <p:txBody>
-          <a:bodyPr wrap="square" rtlCol="0" anchor="ctr"/>
+          <a:bodyPr wrap="square" rtlCol="0" anchor="ctr">
+            <a:normAutofit/>
+          </a:bodyPr>
           <a:lstStyle/>
           <a:p>
             <a:pPr indent="0" marL="0">
@@ -2078,7 +2108,9 @@
           <a:ln/>
         </p:spPr>
         <p:txBody>
-          <a:bodyPr wrap="square" rtlCol="0" anchor="ctr"/>
+          <a:bodyPr wrap="square" rtlCol="0" anchor="ctr">
+            <a:normAutofit/>
+          </a:bodyPr>
           <a:lstStyle/>
           <a:p>
             <a:pPr indent="0" marL="0">
@@ -2126,7 +2158,9 @@
           </a:ln>
         </p:spPr>
         <p:txBody>
-          <a:bodyPr/>
+          <a:bodyPr wrap="square">
+            <a:normAutofit/>
+          </a:bodyPr>
           <a:p/>
         </p:txBody>
       </p:sp>
@@ -2148,7 +2182,9 @@
           <a:ln/>
         </p:spPr>
         <p:txBody>
-          <a:bodyPr wrap="square" rtlCol="0" anchor="ctr"/>
+          <a:bodyPr wrap="square" rtlCol="0" anchor="ctr">
+            <a:normAutofit/>
+          </a:bodyPr>
           <a:lstStyle/>
           <a:p>
             <a:pPr indent="0" marL="0">
@@ -2187,7 +2223,9 @@
           <a:ln/>
         </p:spPr>
         <p:txBody>
-          <a:bodyPr wrap="square" rtlCol="0" anchor="ctr"/>
+          <a:bodyPr wrap="square" rtlCol="0" anchor="ctr">
+            <a:normAutofit/>
+          </a:bodyPr>
           <a:lstStyle/>
           <a:p>
             <a:pPr indent="0" marL="0">
@@ -2226,7 +2264,9 @@
           <a:ln/>
         </p:spPr>
         <p:txBody>
-          <a:bodyPr wrap="square" rtlCol="0" anchor="ctr"/>
+          <a:bodyPr wrap="square" rtlCol="0" anchor="ctr">
+            <a:normAutofit/>
+          </a:bodyPr>
           <a:lstStyle/>
           <a:p>
             <a:pPr indent="0" marL="0">
@@ -2274,7 +2314,9 @@
           </a:ln>
         </p:spPr>
         <p:txBody>
-          <a:bodyPr/>
+          <a:bodyPr wrap="square">
+            <a:normAutofit/>
+          </a:bodyPr>
           <a:p/>
         </p:txBody>
       </p:sp>
@@ -2296,7 +2338,9 @@
           <a:ln/>
         </p:spPr>
         <p:txBody>
-          <a:bodyPr wrap="square" rtlCol="0" anchor="ctr"/>
+          <a:bodyPr wrap="square" rtlCol="0" anchor="ctr">
+            <a:normAutofit/>
+          </a:bodyPr>
           <a:lstStyle/>
           <a:p>
             <a:pPr indent="0" marL="0">
@@ -2335,7 +2379,9 @@
           <a:ln/>
         </p:spPr>
         <p:txBody>
-          <a:bodyPr wrap="square" rtlCol="0" anchor="ctr"/>
+          <a:bodyPr wrap="square" rtlCol="0" anchor="ctr">
+            <a:normAutofit/>
+          </a:bodyPr>
           <a:lstStyle/>
           <a:p>
             <a:pPr indent="0" marL="0">
@@ -2374,7 +2420,9 @@
           <a:ln/>
         </p:spPr>
         <p:txBody>
-          <a:bodyPr wrap="square" rtlCol="0" anchor="ctr"/>
+          <a:bodyPr wrap="square" rtlCol="0" anchor="ctr">
+            <a:normAutofit/>
+          </a:bodyPr>
           <a:lstStyle/>
           <a:p>
             <a:pPr indent="0" marL="0">
@@ -2413,7 +2461,9 @@
           <a:ln/>
         </p:spPr>
         <p:txBody>
-          <a:bodyPr wrap="square" rtlCol="0" anchor="ctr"/>
+          <a:bodyPr wrap="square" rtlCol="0" anchor="ctr">
+            <a:normAutofit/>
+          </a:bodyPr>
           <a:lstStyle/>
           <a:p>
             <a:pPr algn="r" indent="0" marL="0">
@@ -2484,7 +2534,9 @@
           </a:ln>
         </p:spPr>
         <p:txBody>
-          <a:bodyPr/>
+          <a:bodyPr wrap="square">
+            <a:normAutofit/>
+          </a:bodyPr>
           <a:p/>
         </p:txBody>
       </p:sp>
@@ -2513,7 +2565,9 @@
           </a:ln>
         </p:spPr>
         <p:txBody>
-          <a:bodyPr/>
+          <a:bodyPr wrap="square">
+            <a:normAutofit/>
+          </a:bodyPr>
           <a:p/>
         </p:txBody>
       </p:sp>
@@ -2535,7 +2589,9 @@
           <a:ln/>
         </p:spPr>
         <p:txBody>
-          <a:bodyPr wrap="square" rtlCol="0" anchor="ctr"/>
+          <a:bodyPr wrap="square" rtlCol="0" anchor="ctr">
+            <a:normAutofit/>
+          </a:bodyPr>
           <a:lstStyle/>
           <a:p>
             <a:pPr indent="0" marL="0">
@@ -2574,7 +2630,9 @@
           <a:ln/>
         </p:spPr>
         <p:txBody>
-          <a:bodyPr wrap="square" rtlCol="0" anchor="ctr"/>
+          <a:bodyPr wrap="square" rtlCol="0" anchor="ctr">
+            <a:normAutofit/>
+          </a:bodyPr>
           <a:lstStyle/>
           <a:p>
             <a:pPr indent="0" marL="0">
@@ -2620,7 +2678,9 @@
           </a:ln>
         </p:spPr>
         <p:txBody>
-          <a:bodyPr/>
+          <a:bodyPr wrap="square">
+            <a:normAutofit/>
+          </a:bodyPr>
           <a:p/>
         </p:txBody>
       </p:sp>
@@ -2651,7 +2711,9 @@
           </a:ln>
         </p:spPr>
         <p:txBody>
-          <a:bodyPr/>
+          <a:bodyPr wrap="square">
+            <a:normAutofit/>
+          </a:bodyPr>
           <a:p/>
         </p:txBody>
       </p:sp>
@@ -2673,7 +2735,9 @@
           <a:ln/>
         </p:spPr>
         <p:txBody>
-          <a:bodyPr wrap="square" rtlCol="0" anchor="ctr"/>
+          <a:bodyPr wrap="square" rtlCol="0" anchor="ctr">
+            <a:normAutofit/>
+          </a:bodyPr>
           <a:lstStyle/>
           <a:p>
             <a:pPr algn="ctr" indent="0" marL="0">
@@ -2712,7 +2776,9 @@
           <a:ln/>
         </p:spPr>
         <p:txBody>
-          <a:bodyPr wrap="square" rtlCol="0" anchor="ctr"/>
+          <a:bodyPr wrap="square" rtlCol="0" anchor="ctr">
+            <a:normAutofit/>
+          </a:bodyPr>
           <a:lstStyle/>
           <a:p>
             <a:pPr indent="0" marL="0">
@@ -2758,7 +2824,9 @@
           </a:ln>
         </p:spPr>
         <p:txBody>
-          <a:bodyPr/>
+          <a:bodyPr wrap="square">
+            <a:normAutofit/>
+          </a:bodyPr>
           <a:p/>
         </p:txBody>
       </p:sp>
@@ -2789,7 +2857,9 @@
           </a:ln>
         </p:spPr>
         <p:txBody>
-          <a:bodyPr/>
+          <a:bodyPr wrap="square">
+            <a:normAutofit/>
+          </a:bodyPr>
           <a:p/>
         </p:txBody>
       </p:sp>
@@ -2811,7 +2881,9 @@
           <a:ln/>
         </p:spPr>
         <p:txBody>
-          <a:bodyPr wrap="square" rtlCol="0" anchor="ctr"/>
+          <a:bodyPr wrap="square" rtlCol="0" anchor="ctr">
+            <a:normAutofit/>
+          </a:bodyPr>
           <a:lstStyle/>
           <a:p>
             <a:pPr algn="ctr" indent="0" marL="0">
@@ -2850,7 +2922,9 @@
           <a:ln/>
         </p:spPr>
         <p:txBody>
-          <a:bodyPr wrap="square" rtlCol="0" anchor="ctr"/>
+          <a:bodyPr wrap="square" rtlCol="0" anchor="ctr">
+            <a:normAutofit/>
+          </a:bodyPr>
           <a:lstStyle/>
           <a:p>
             <a:pPr indent="0" marL="0">
@@ -2889,7 +2963,9 @@
           <a:ln/>
         </p:spPr>
         <p:txBody>
-          <a:bodyPr wrap="square" rtlCol="0" anchor="ctr"/>
+          <a:bodyPr wrap="square" rtlCol="0" anchor="ctr">
+            <a:normAutofit/>
+          </a:bodyPr>
           <a:lstStyle/>
           <a:p>
             <a:pPr indent="0" marL="0">
@@ -2937,7 +3013,9 @@
           </a:ln>
         </p:spPr>
         <p:txBody>
-          <a:bodyPr/>
+          <a:bodyPr wrap="square">
+            <a:normAutofit/>
+          </a:bodyPr>
           <a:p/>
         </p:txBody>
       </p:sp>
@@ -2968,7 +3046,9 @@
           </a:ln>
         </p:spPr>
         <p:txBody>
-          <a:bodyPr/>
+          <a:bodyPr wrap="square">
+            <a:normAutofit/>
+          </a:bodyPr>
           <a:p/>
         </p:txBody>
       </p:sp>
@@ -2990,7 +3070,9 @@
           <a:ln/>
         </p:spPr>
         <p:txBody>
-          <a:bodyPr wrap="square" rtlCol="0" anchor="ctr"/>
+          <a:bodyPr wrap="square" rtlCol="0" anchor="ctr">
+            <a:normAutofit/>
+          </a:bodyPr>
           <a:lstStyle/>
           <a:p>
             <a:pPr algn="ctr" indent="0" marL="0">
@@ -3029,7 +3111,9 @@
           <a:ln/>
         </p:spPr>
         <p:txBody>
-          <a:bodyPr wrap="square" rtlCol="0" anchor="ctr"/>
+          <a:bodyPr wrap="square" rtlCol="0" anchor="ctr">
+            <a:normAutofit/>
+          </a:bodyPr>
           <a:lstStyle/>
           <a:p>
             <a:pPr indent="0" marL="0">
@@ -3077,7 +3161,9 @@
           </a:ln>
         </p:spPr>
         <p:txBody>
-          <a:bodyPr/>
+          <a:bodyPr wrap="square">
+            <a:normAutofit/>
+          </a:bodyPr>
           <a:p/>
         </p:txBody>
       </p:sp>
@@ -3108,7 +3194,9 @@
           </a:ln>
         </p:spPr>
         <p:txBody>
-          <a:bodyPr/>
+          <a:bodyPr wrap="square">
+            <a:normAutofit/>
+          </a:bodyPr>
           <a:p/>
         </p:txBody>
       </p:sp>
@@ -3130,7 +3218,9 @@
           <a:ln/>
         </p:spPr>
         <p:txBody>
-          <a:bodyPr wrap="square" rtlCol="0" anchor="ctr"/>
+          <a:bodyPr wrap="square" rtlCol="0" anchor="ctr">
+            <a:normAutofit/>
+          </a:bodyPr>
           <a:lstStyle/>
           <a:p>
             <a:pPr algn="ctr" indent="0" marL="0">
@@ -3169,7 +3259,9 @@
           <a:ln/>
         </p:spPr>
         <p:txBody>
-          <a:bodyPr wrap="square" rtlCol="0" anchor="ctr"/>
+          <a:bodyPr wrap="square" rtlCol="0" anchor="ctr">
+            <a:normAutofit/>
+          </a:bodyPr>
           <a:lstStyle/>
           <a:p>
             <a:pPr indent="0" marL="0">
@@ -3217,7 +3309,9 @@
           </a:ln>
         </p:spPr>
         <p:txBody>
-          <a:bodyPr/>
+          <a:bodyPr wrap="square">
+            <a:normAutofit/>
+          </a:bodyPr>
           <a:p/>
         </p:txBody>
       </p:sp>
@@ -3248,7 +3342,9 @@
           </a:ln>
         </p:spPr>
         <p:txBody>
-          <a:bodyPr/>
+          <a:bodyPr wrap="square">
+            <a:normAutofit/>
+          </a:bodyPr>
           <a:p/>
         </p:txBody>
       </p:sp>
@@ -3270,7 +3366,9 @@
           <a:ln/>
         </p:spPr>
         <p:txBody>
-          <a:bodyPr wrap="square" rtlCol="0" anchor="ctr"/>
+          <a:bodyPr wrap="square" rtlCol="0" anchor="ctr">
+            <a:normAutofit/>
+          </a:bodyPr>
           <a:lstStyle/>
           <a:p>
             <a:pPr algn="ctr" indent="0" marL="0">
@@ -3309,7 +3407,9 @@
           <a:ln/>
         </p:spPr>
         <p:txBody>
-          <a:bodyPr wrap="square" rtlCol="0" anchor="ctr"/>
+          <a:bodyPr wrap="square" rtlCol="0" anchor="ctr">
+            <a:normAutofit/>
+          </a:bodyPr>
           <a:lstStyle/>
           <a:p>
             <a:pPr indent="0" marL="0">
@@ -3357,7 +3457,9 @@
           </a:ln>
         </p:spPr>
         <p:txBody>
-          <a:bodyPr/>
+          <a:bodyPr wrap="square">
+            <a:normAutofit/>
+          </a:bodyPr>
           <a:p/>
         </p:txBody>
       </p:sp>
@@ -3388,7 +3490,9 @@
           </a:ln>
         </p:spPr>
         <p:txBody>
-          <a:bodyPr/>
+          <a:bodyPr wrap="square">
+            <a:normAutofit/>
+          </a:bodyPr>
           <a:p/>
         </p:txBody>
       </p:sp>
@@ -3410,7 +3514,9 @@
           <a:ln/>
         </p:spPr>
         <p:txBody>
-          <a:bodyPr wrap="square" rtlCol="0" anchor="ctr"/>
+          <a:bodyPr wrap="square" rtlCol="0" anchor="ctr">
+            <a:normAutofit/>
+          </a:bodyPr>
           <a:lstStyle/>
           <a:p>
             <a:pPr algn="ctr" indent="0" marL="0">
@@ -3449,7 +3555,9 @@
           <a:ln/>
         </p:spPr>
         <p:txBody>
-          <a:bodyPr wrap="square" rtlCol="0" anchor="ctr"/>
+          <a:bodyPr wrap="square" rtlCol="0" anchor="ctr">
+            <a:normAutofit/>
+          </a:bodyPr>
           <a:lstStyle/>
           <a:p>
             <a:pPr indent="0" marL="0">
@@ -3497,7 +3605,9 @@
           </a:ln>
         </p:spPr>
         <p:txBody>
-          <a:bodyPr/>
+          <a:bodyPr wrap="square">
+            <a:normAutofit/>
+          </a:bodyPr>
           <a:p/>
         </p:txBody>
       </p:sp>
@@ -3528,7 +3638,9 @@
           </a:ln>
         </p:spPr>
         <p:txBody>
-          <a:bodyPr/>
+          <a:bodyPr wrap="square">
+            <a:normAutofit/>
+          </a:bodyPr>
           <a:p/>
         </p:txBody>
       </p:sp>
@@ -3550,7 +3662,9 @@
           <a:ln/>
         </p:spPr>
         <p:txBody>
-          <a:bodyPr wrap="square" rtlCol="0" anchor="ctr"/>
+          <a:bodyPr wrap="square" rtlCol="0" anchor="ctr">
+            <a:normAutofit/>
+          </a:bodyPr>
           <a:lstStyle/>
           <a:p>
             <a:pPr algn="ctr" indent="0" marL="0">
@@ -3589,7 +3703,9 @@
           <a:ln/>
         </p:spPr>
         <p:txBody>
-          <a:bodyPr wrap="square" rtlCol="0" anchor="ctr"/>
+          <a:bodyPr wrap="square" rtlCol="0" anchor="ctr">
+            <a:normAutofit/>
+          </a:bodyPr>
           <a:lstStyle/>
           <a:p>
             <a:pPr indent="0" marL="0">
@@ -3628,7 +3744,9 @@
           <a:ln/>
         </p:spPr>
         <p:txBody>
-          <a:bodyPr wrap="square" rtlCol="0" anchor="ctr"/>
+          <a:bodyPr wrap="square" rtlCol="0" anchor="ctr">
+            <a:normAutofit/>
+          </a:bodyPr>
           <a:lstStyle/>
           <a:p>
             <a:pPr algn="r" indent="0" marL="0">
@@ -3699,7 +3817,9 @@
           </a:ln>
         </p:spPr>
         <p:txBody>
-          <a:bodyPr/>
+          <a:bodyPr wrap="square">
+            <a:normAutofit/>
+          </a:bodyPr>
           <a:p/>
         </p:txBody>
       </p:sp>
@@ -3728,7 +3848,9 @@
           </a:ln>
         </p:spPr>
         <p:txBody>
-          <a:bodyPr/>
+          <a:bodyPr wrap="square">
+            <a:normAutofit/>
+          </a:bodyPr>
           <a:p/>
         </p:txBody>
       </p:sp>
@@ -3759,7 +3881,9 @@
           </a:ln>
         </p:spPr>
         <p:txBody>
-          <a:bodyPr/>
+          <a:bodyPr wrap="square">
+            <a:normAutofit/>
+          </a:bodyPr>
           <a:p/>
         </p:txBody>
       </p:sp>
@@ -3781,7 +3905,9 @@
           <a:ln/>
         </p:spPr>
         <p:txBody>
-          <a:bodyPr wrap="square" rtlCol="0" anchor="ctr"/>
+          <a:bodyPr wrap="square" rtlCol="0" anchor="ctr">
+            <a:normAutofit/>
+          </a:bodyPr>
           <a:lstStyle/>
           <a:p>
             <a:pPr algn="ctr" indent="0" marL="0">
@@ -3820,7 +3946,9 @@
           <a:ln/>
         </p:spPr>
         <p:txBody>
-          <a:bodyPr wrap="square" rtlCol="0" anchor="ctr"/>
+          <a:bodyPr wrap="square" rtlCol="0" anchor="ctr">
+            <a:normAutofit/>
+          </a:bodyPr>
           <a:lstStyle/>
           <a:p>
             <a:pPr indent="0" marL="0">
@@ -3859,7 +3987,9 @@
           <a:ln/>
         </p:spPr>
         <p:txBody>
-          <a:bodyPr wrap="square" rtlCol="0" anchor="ctr"/>
+          <a:bodyPr wrap="square" rtlCol="0" anchor="ctr">
+            <a:normAutofit/>
+          </a:bodyPr>
           <a:lstStyle/>
           <a:p>
             <a:pPr indent="0" marL="0">
@@ -3907,7 +4037,9 @@
           </a:ln>
         </p:spPr>
         <p:txBody>
-          <a:bodyPr/>
+          <a:bodyPr wrap="square">
+            <a:normAutofit/>
+          </a:bodyPr>
           <a:p/>
         </p:txBody>
       </p:sp>
@@ -3929,7 +4061,9 @@
           <a:ln/>
         </p:spPr>
         <p:txBody>
-          <a:bodyPr wrap="square" rtlCol="0" anchor="ctr"/>
+          <a:bodyPr wrap="square" rtlCol="0" anchor="ctr">
+            <a:normAutofit/>
+          </a:bodyPr>
           <a:lstStyle/>
           <a:p>
             <a:pPr indent="0" marL="0">
@@ -3968,7 +4102,9 @@
           <a:ln/>
         </p:spPr>
         <p:txBody>
-          <a:bodyPr wrap="square" rtlCol="0" anchor="t"/>
+          <a:bodyPr wrap="square" rtlCol="0" anchor="t">
+            <a:normAutofit/>
+          </a:bodyPr>
           <a:lstStyle/>
           <a:p>
             <a:pPr indent="0" marL="0">
@@ -4160,7 +4296,9 @@
           <a:ln/>
         </p:spPr>
         <p:txBody>
-          <a:bodyPr wrap="square" rtlCol="0" anchor="ctr"/>
+          <a:bodyPr wrap="square" rtlCol="0" anchor="ctr">
+            <a:normAutofit/>
+          </a:bodyPr>
           <a:lstStyle/>
           <a:p>
             <a:pPr algn="r" indent="0" marL="0">
@@ -4231,7 +4369,9 @@
           </a:ln>
         </p:spPr>
         <p:txBody>
-          <a:bodyPr/>
+          <a:bodyPr wrap="square">
+            <a:normAutofit/>
+          </a:bodyPr>
           <a:p/>
         </p:txBody>
       </p:sp>
@@ -4260,7 +4400,9 @@
           </a:ln>
         </p:spPr>
         <p:txBody>
-          <a:bodyPr/>
+          <a:bodyPr wrap="square">
+            <a:normAutofit/>
+          </a:bodyPr>
           <a:p/>
         </p:txBody>
       </p:sp>
@@ -4291,7 +4433,9 @@
           </a:ln>
         </p:spPr>
         <p:txBody>
-          <a:bodyPr/>
+          <a:bodyPr wrap="square">
+            <a:normAutofit/>
+          </a:bodyPr>
           <a:p/>
         </p:txBody>
       </p:sp>
@@ -4313,7 +4457,9 @@
           <a:ln/>
         </p:spPr>
         <p:txBody>
-          <a:bodyPr wrap="square" rtlCol="0" anchor="ctr"/>
+          <a:bodyPr wrap="square" rtlCol="0" anchor="ctr">
+            <a:normAutofit/>
+          </a:bodyPr>
           <a:lstStyle/>
           <a:p>
             <a:pPr algn="ctr" indent="0" marL="0">
@@ -4352,7 +4498,9 @@
           <a:ln/>
         </p:spPr>
         <p:txBody>
-          <a:bodyPr wrap="square" rtlCol="0" anchor="ctr"/>
+          <a:bodyPr wrap="square" rtlCol="0" anchor="ctr">
+            <a:normAutofit/>
+          </a:bodyPr>
           <a:lstStyle/>
           <a:p>
             <a:pPr indent="0" marL="0">
@@ -4391,7 +4539,9 @@
           <a:ln/>
         </p:spPr>
         <p:txBody>
-          <a:bodyPr wrap="square" rtlCol="0" anchor="ctr"/>
+          <a:bodyPr wrap="square" rtlCol="0" anchor="ctr">
+            <a:normAutofit/>
+          </a:bodyPr>
           <a:lstStyle/>
           <a:p>
             <a:pPr indent="0" marL="0">
@@ -4439,7 +4589,9 @@
           </a:ln>
         </p:spPr>
         <p:txBody>
-          <a:bodyPr/>
+          <a:bodyPr wrap="square">
+            <a:normAutofit/>
+          </a:bodyPr>
           <a:p/>
         </p:txBody>
       </p:sp>
@@ -4461,7 +4613,9 @@
           <a:ln/>
         </p:spPr>
         <p:txBody>
-          <a:bodyPr wrap="square" rtlCol="0" anchor="ctr"/>
+          <a:bodyPr wrap="square" rtlCol="0" anchor="ctr">
+            <a:normAutofit/>
+          </a:bodyPr>
           <a:lstStyle/>
           <a:p>
             <a:pPr indent="0" marL="0">
@@ -4500,7 +4654,9 @@
           <a:ln/>
         </p:spPr>
         <p:txBody>
-          <a:bodyPr wrap="square" rtlCol="0" anchor="ctr"/>
+          <a:bodyPr wrap="square" rtlCol="0" anchor="ctr">
+            <a:normAutofit/>
+          </a:bodyPr>
           <a:lstStyle/>
           <a:p>
             <a:pPr indent="0" marL="0">
@@ -4539,7 +4695,9 @@
           <a:ln/>
         </p:spPr>
         <p:txBody>
-          <a:bodyPr wrap="square" rtlCol="0" anchor="t"/>
+          <a:bodyPr wrap="square" rtlCol="0" anchor="t">
+            <a:normAutofit/>
+          </a:bodyPr>
           <a:lstStyle/>
           <a:p>
             <a:pPr indent="0" marL="0">
@@ -4578,7 +4736,9 @@
           <a:ln/>
         </p:spPr>
         <p:txBody>
-          <a:bodyPr wrap="square" rtlCol="0" anchor="ctr"/>
+          <a:bodyPr wrap="square" rtlCol="0" anchor="ctr">
+            <a:normAutofit/>
+          </a:bodyPr>
           <a:lstStyle/>
           <a:p>
             <a:pPr indent="0" marL="0">
@@ -4617,7 +4777,9 @@
           <a:ln/>
         </p:spPr>
         <p:txBody>
-          <a:bodyPr wrap="square" rtlCol="0" anchor="t"/>
+          <a:bodyPr wrap="square" rtlCol="0" anchor="t">
+            <a:normAutofit/>
+          </a:bodyPr>
           <a:lstStyle/>
           <a:p>
             <a:pPr indent="0" marL="0">
@@ -4656,7 +4818,9 @@
           <a:ln/>
         </p:spPr>
         <p:txBody>
-          <a:bodyPr wrap="square" rtlCol="0" anchor="ctr"/>
+          <a:bodyPr wrap="square" rtlCol="0" anchor="ctr">
+            <a:normAutofit/>
+          </a:bodyPr>
           <a:lstStyle/>
           <a:p>
             <a:pPr indent="0" marL="0">
@@ -4695,7 +4859,9 @@
           <a:ln/>
         </p:spPr>
         <p:txBody>
-          <a:bodyPr wrap="square" rtlCol="0" anchor="t"/>
+          <a:bodyPr wrap="square" rtlCol="0" anchor="t">
+            <a:normAutofit/>
+          </a:bodyPr>
           <a:lstStyle/>
           <a:p>
             <a:pPr indent="0" marL="0">
@@ -4743,7 +4909,9 @@
           </a:ln>
         </p:spPr>
         <p:txBody>
-          <a:bodyPr/>
+          <a:bodyPr wrap="square">
+            <a:normAutofit/>
+          </a:bodyPr>
           <a:p/>
         </p:txBody>
       </p:sp>
@@ -4765,7 +4933,9 @@
           <a:ln/>
         </p:spPr>
         <p:txBody>
-          <a:bodyPr wrap="square" rtlCol="0" anchor="ctr"/>
+          <a:bodyPr wrap="square" rtlCol="0" anchor="ctr">
+            <a:normAutofit/>
+          </a:bodyPr>
           <a:lstStyle/>
           <a:p>
             <a:pPr indent="0" marL="0">
@@ -4804,7 +4974,9 @@
           <a:ln/>
         </p:spPr>
         <p:txBody>
-          <a:bodyPr wrap="square" rtlCol="0" anchor="t"/>
+          <a:bodyPr wrap="square" rtlCol="0" anchor="t">
+            <a:normAutofit/>
+          </a:bodyPr>
           <a:lstStyle/>
           <a:p>
             <a:pPr indent="0" marL="0">
@@ -4843,7 +5015,9 @@
           <a:ln/>
         </p:spPr>
         <p:txBody>
-          <a:bodyPr wrap="square" rtlCol="0" anchor="t"/>
+          <a:bodyPr wrap="square" rtlCol="0" anchor="t">
+            <a:normAutofit/>
+          </a:bodyPr>
           <a:lstStyle/>
           <a:p>
             <a:pPr indent="0" marL="0">
@@ -4882,7 +5056,9 @@
           <a:ln/>
         </p:spPr>
         <p:txBody>
-          <a:bodyPr wrap="square" rtlCol="0" anchor="t"/>
+          <a:bodyPr wrap="square" rtlCol="0" anchor="t">
+            <a:normAutofit/>
+          </a:bodyPr>
           <a:lstStyle/>
           <a:p>
             <a:pPr indent="0" marL="0">
@@ -4921,7 +5097,9 @@
           <a:ln/>
         </p:spPr>
         <p:txBody>
-          <a:bodyPr wrap="square" rtlCol="0" anchor="ctr"/>
+          <a:bodyPr wrap="square" rtlCol="0" anchor="ctr">
+            <a:normAutofit/>
+          </a:bodyPr>
           <a:lstStyle/>
           <a:p>
             <a:pPr algn="r" indent="0" marL="0">
@@ -4992,7 +5170,9 @@
           </a:ln>
         </p:spPr>
         <p:txBody>
-          <a:bodyPr/>
+          <a:bodyPr wrap="square">
+            <a:normAutofit/>
+          </a:bodyPr>
           <a:p/>
         </p:txBody>
       </p:sp>
@@ -5021,7 +5201,9 @@
           </a:ln>
         </p:spPr>
         <p:txBody>
-          <a:bodyPr/>
+          <a:bodyPr wrap="square">
+            <a:normAutofit/>
+          </a:bodyPr>
           <a:p/>
         </p:txBody>
       </p:sp>
@@ -5052,7 +5234,9 @@
           </a:ln>
         </p:spPr>
         <p:txBody>
-          <a:bodyPr/>
+          <a:bodyPr wrap="square">
+            <a:normAutofit/>
+          </a:bodyPr>
           <a:p/>
         </p:txBody>
       </p:sp>
@@ -5074,7 +5258,9 @@
           <a:ln/>
         </p:spPr>
         <p:txBody>
-          <a:bodyPr wrap="square" rtlCol="0" anchor="ctr"/>
+          <a:bodyPr wrap="square" rtlCol="0" anchor="ctr">
+            <a:normAutofit/>
+          </a:bodyPr>
           <a:lstStyle/>
           <a:p>
             <a:pPr algn="ctr" indent="0" marL="0">
@@ -5113,7 +5299,9 @@
           <a:ln/>
         </p:spPr>
         <p:txBody>
-          <a:bodyPr wrap="square" rtlCol="0" anchor="ctr"/>
+          <a:bodyPr wrap="square" rtlCol="0" anchor="ctr">
+            <a:normAutofit/>
+          </a:bodyPr>
           <a:lstStyle/>
           <a:p>
             <a:pPr indent="0" marL="0">
@@ -5152,7 +5340,9 @@
           <a:ln/>
         </p:spPr>
         <p:txBody>
-          <a:bodyPr wrap="square" rtlCol="0" anchor="ctr"/>
+          <a:bodyPr wrap="square" rtlCol="0" anchor="ctr">
+            <a:normAutofit/>
+          </a:bodyPr>
           <a:lstStyle/>
           <a:p>
             <a:pPr indent="0" marL="0">
@@ -5200,7 +5390,9 @@
           </a:ln>
         </p:spPr>
         <p:txBody>
-          <a:bodyPr/>
+          <a:bodyPr wrap="square">
+            <a:normAutofit/>
+          </a:bodyPr>
           <a:p/>
         </p:txBody>
       </p:sp>
@@ -5222,7 +5414,9 @@
           <a:ln/>
         </p:spPr>
         <p:txBody>
-          <a:bodyPr wrap="square" rtlCol="0" anchor="ctr"/>
+          <a:bodyPr wrap="square" rtlCol="0" anchor="ctr">
+            <a:normAutofit/>
+          </a:bodyPr>
           <a:lstStyle/>
           <a:p>
             <a:pPr indent="0" marL="0">
@@ -5261,7 +5455,9 @@
           <a:ln/>
         </p:spPr>
         <p:txBody>
-          <a:bodyPr wrap="square" rtlCol="0" anchor="t"/>
+          <a:bodyPr wrap="square" rtlCol="0" anchor="t">
+            <a:normAutofit/>
+          </a:bodyPr>
           <a:lstStyle/>
           <a:p>
             <a:pPr indent="0" marL="0">
@@ -5572,7 +5768,9 @@
           <a:ln/>
         </p:spPr>
         <p:txBody>
-          <a:bodyPr wrap="square" rtlCol="0" anchor="ctr"/>
+          <a:bodyPr wrap="square" rtlCol="0" anchor="ctr">
+            <a:normAutofit/>
+          </a:bodyPr>
           <a:lstStyle/>
           <a:p>
             <a:pPr algn="r" indent="0" marL="0">
@@ -5643,7 +5841,9 @@
           </a:ln>
         </p:spPr>
         <p:txBody>
-          <a:bodyPr/>
+          <a:bodyPr wrap="square">
+            <a:normAutofit/>
+          </a:bodyPr>
           <a:p/>
         </p:txBody>
       </p:sp>
@@ -5672,7 +5872,9 @@
           </a:ln>
         </p:spPr>
         <p:txBody>
-          <a:bodyPr/>
+          <a:bodyPr wrap="square">
+            <a:normAutofit/>
+          </a:bodyPr>
           <a:p/>
         </p:txBody>
       </p:sp>
@@ -5703,7 +5905,9 @@
           </a:ln>
         </p:spPr>
         <p:txBody>
-          <a:bodyPr/>
+          <a:bodyPr wrap="square">
+            <a:normAutofit/>
+          </a:bodyPr>
           <a:p/>
         </p:txBody>
       </p:sp>
@@ -5725,7 +5929,9 @@
           <a:ln/>
         </p:spPr>
         <p:txBody>
-          <a:bodyPr wrap="square" rtlCol="0" anchor="ctr"/>
+          <a:bodyPr wrap="square" rtlCol="0" anchor="ctr">
+            <a:normAutofit/>
+          </a:bodyPr>
           <a:lstStyle/>
           <a:p>
             <a:pPr algn="ctr" indent="0" marL="0">
@@ -5764,7 +5970,9 @@
           <a:ln/>
         </p:spPr>
         <p:txBody>
-          <a:bodyPr wrap="square" rtlCol="0" anchor="ctr"/>
+          <a:bodyPr wrap="square" rtlCol="0" anchor="ctr">
+            <a:normAutofit/>
+          </a:bodyPr>
           <a:lstStyle/>
           <a:p>
             <a:pPr indent="0" marL="0">
@@ -5803,7 +6011,9 @@
           <a:ln/>
         </p:spPr>
         <p:txBody>
-          <a:bodyPr wrap="square" rtlCol="0" anchor="ctr"/>
+          <a:bodyPr wrap="square" rtlCol="0" anchor="ctr">
+            <a:normAutofit/>
+          </a:bodyPr>
           <a:lstStyle/>
           <a:p>
             <a:pPr indent="0" marL="0">
@@ -5851,7 +6061,9 @@
           </a:ln>
         </p:spPr>
         <p:txBody>
-          <a:bodyPr/>
+          <a:bodyPr wrap="square">
+            <a:normAutofit/>
+          </a:bodyPr>
           <a:p/>
         </p:txBody>
       </p:sp>
@@ -5873,7 +6085,9 @@
           <a:ln/>
         </p:spPr>
         <p:txBody>
-          <a:bodyPr wrap="square" rtlCol="0" anchor="ctr"/>
+          <a:bodyPr wrap="square" rtlCol="0" anchor="ctr">
+            <a:normAutofit/>
+          </a:bodyPr>
           <a:lstStyle/>
           <a:p>
             <a:pPr indent="0" marL="0">
@@ -5912,7 +6126,9 @@
           <a:ln/>
         </p:spPr>
         <p:txBody>
-          <a:bodyPr wrap="square" rtlCol="0" anchor="ctr"/>
+          <a:bodyPr wrap="square" rtlCol="0" anchor="ctr">
+            <a:normAutofit/>
+          </a:bodyPr>
           <a:lstStyle/>
           <a:p>
             <a:pPr indent="0" marL="0">
@@ -5951,7 +6167,9 @@
           <a:ln/>
         </p:spPr>
         <p:txBody>
-          <a:bodyPr wrap="square" rtlCol="0" anchor="t"/>
+          <a:bodyPr wrap="square" rtlCol="0" anchor="t">
+            <a:normAutofit/>
+          </a:bodyPr>
           <a:lstStyle/>
           <a:p>
             <a:pPr indent="0" marL="0">
@@ -5990,7 +6208,9 @@
           <a:ln/>
         </p:spPr>
         <p:txBody>
-          <a:bodyPr wrap="square" rtlCol="0" anchor="ctr"/>
+          <a:bodyPr wrap="square" rtlCol="0" anchor="ctr">
+            <a:normAutofit/>
+          </a:bodyPr>
           <a:lstStyle/>
           <a:p>
             <a:pPr indent="0" marL="0">
@@ -6029,7 +6249,9 @@
           <a:ln/>
         </p:spPr>
         <p:txBody>
-          <a:bodyPr wrap="square" rtlCol="0" anchor="t"/>
+          <a:bodyPr wrap="square" rtlCol="0" anchor="t">
+            <a:normAutofit/>
+          </a:bodyPr>
           <a:lstStyle/>
           <a:p>
             <a:pPr indent="0" marL="0">
@@ -6068,7 +6290,9 @@
           <a:ln/>
         </p:spPr>
         <p:txBody>
-          <a:bodyPr wrap="square" rtlCol="0" anchor="ctr"/>
+          <a:bodyPr wrap="square" rtlCol="0" anchor="ctr">
+            <a:normAutofit/>
+          </a:bodyPr>
           <a:lstStyle/>
           <a:p>
             <a:pPr indent="0" marL="0">
@@ -6107,7 +6331,9 @@
           <a:ln/>
         </p:spPr>
         <p:txBody>
-          <a:bodyPr wrap="square" rtlCol="0" anchor="t"/>
+          <a:bodyPr wrap="square" rtlCol="0" anchor="t">
+            <a:normAutofit/>
+          </a:bodyPr>
           <a:lstStyle/>
           <a:p>
             <a:pPr indent="0" marL="0">
@@ -6155,7 +6381,9 @@
           </a:ln>
         </p:spPr>
         <p:txBody>
-          <a:bodyPr/>
+          <a:bodyPr wrap="square">
+            <a:normAutofit/>
+          </a:bodyPr>
           <a:p/>
         </p:txBody>
       </p:sp>
@@ -6177,7 +6405,9 @@
           <a:ln/>
         </p:spPr>
         <p:txBody>
-          <a:bodyPr wrap="square" rtlCol="0" anchor="ctr"/>
+          <a:bodyPr wrap="square" rtlCol="0" anchor="ctr">
+            <a:normAutofit/>
+          </a:bodyPr>
           <a:lstStyle/>
           <a:p>
             <a:pPr indent="0" marL="0">
@@ -6216,7 +6446,9 @@
           <a:ln/>
         </p:spPr>
         <p:txBody>
-          <a:bodyPr wrap="square" rtlCol="0" anchor="t"/>
+          <a:bodyPr wrap="square" rtlCol="0" anchor="t">
+            <a:normAutofit/>
+          </a:bodyPr>
           <a:lstStyle/>
           <a:p>
             <a:pPr indent="0" marL="0">
@@ -6255,7 +6487,9 @@
           <a:ln/>
         </p:spPr>
         <p:txBody>
-          <a:bodyPr wrap="square" rtlCol="0" anchor="t"/>
+          <a:bodyPr wrap="square" rtlCol="0" anchor="t">
+            <a:normAutofit/>
+          </a:bodyPr>
           <a:lstStyle/>
           <a:p>
             <a:pPr indent="0" marL="0">
@@ -6294,7 +6528,9 @@
           <a:ln/>
         </p:spPr>
         <p:txBody>
-          <a:bodyPr wrap="square" rtlCol="0" anchor="t"/>
+          <a:bodyPr wrap="square" rtlCol="0" anchor="t">
+            <a:normAutofit/>
+          </a:bodyPr>
           <a:lstStyle/>
           <a:p>
             <a:pPr indent="0" marL="0">
@@ -6333,7 +6569,9 @@
           <a:ln/>
         </p:spPr>
         <p:txBody>
-          <a:bodyPr wrap="square" rtlCol="0" anchor="ctr"/>
+          <a:bodyPr wrap="square" rtlCol="0" anchor="ctr">
+            <a:normAutofit/>
+          </a:bodyPr>
           <a:lstStyle/>
           <a:p>
             <a:pPr algn="r" indent="0" marL="0">
@@ -6404,7 +6642,9 @@
           </a:ln>
         </p:spPr>
         <p:txBody>
-          <a:bodyPr/>
+          <a:bodyPr wrap="square">
+            <a:normAutofit/>
+          </a:bodyPr>
           <a:p/>
         </p:txBody>
       </p:sp>
@@ -6433,7 +6673,9 @@
           </a:ln>
         </p:spPr>
         <p:txBody>
-          <a:bodyPr/>
+          <a:bodyPr wrap="square">
+            <a:normAutofit/>
+          </a:bodyPr>
           <a:p/>
         </p:txBody>
       </p:sp>
@@ -6464,7 +6706,9 @@
           </a:ln>
         </p:spPr>
         <p:txBody>
-          <a:bodyPr/>
+          <a:bodyPr wrap="square">
+            <a:normAutofit/>
+          </a:bodyPr>
           <a:p/>
         </p:txBody>
       </p:sp>
@@ -6486,7 +6730,9 @@
           <a:ln/>
         </p:spPr>
         <p:txBody>
-          <a:bodyPr wrap="square" rtlCol="0" anchor="ctr"/>
+          <a:bodyPr wrap="square" rtlCol="0" anchor="ctr">
+            <a:normAutofit/>
+          </a:bodyPr>
           <a:lstStyle/>
           <a:p>
             <a:pPr algn="ctr" indent="0" marL="0">
@@ -6525,7 +6771,9 @@
           <a:ln/>
         </p:spPr>
         <p:txBody>
-          <a:bodyPr wrap="square" rtlCol="0" anchor="ctr"/>
+          <a:bodyPr wrap="square" rtlCol="0" anchor="ctr">
+            <a:normAutofit/>
+          </a:bodyPr>
           <a:lstStyle/>
           <a:p>
             <a:pPr indent="0" marL="0">
@@ -6564,7 +6812,9 @@
           <a:ln/>
         </p:spPr>
         <p:txBody>
-          <a:bodyPr wrap="square" rtlCol="0" anchor="ctr"/>
+          <a:bodyPr wrap="square" rtlCol="0" anchor="ctr">
+            <a:normAutofit/>
+          </a:bodyPr>
           <a:lstStyle/>
           <a:p>
             <a:pPr indent="0" marL="0">
@@ -6612,7 +6862,9 @@
           </a:ln>
         </p:spPr>
         <p:txBody>
-          <a:bodyPr/>
+          <a:bodyPr wrap="square">
+            <a:normAutofit/>
+          </a:bodyPr>
           <a:p/>
         </p:txBody>
       </p:sp>
@@ -6634,7 +6886,9 @@
           <a:ln/>
         </p:spPr>
         <p:txBody>
-          <a:bodyPr wrap="square" rtlCol="0" anchor="ctr"/>
+          <a:bodyPr wrap="square" rtlCol="0" anchor="ctr">
+            <a:normAutofit/>
+          </a:bodyPr>
           <a:lstStyle/>
           <a:p>
             <a:pPr indent="0" marL="0">
@@ -6673,7 +6927,9 @@
           <a:ln/>
         </p:spPr>
         <p:txBody>
-          <a:bodyPr wrap="square" rtlCol="0" anchor="ctr"/>
+          <a:bodyPr wrap="square" rtlCol="0" anchor="ctr">
+            <a:normAutofit/>
+          </a:bodyPr>
           <a:lstStyle/>
           <a:p>
             <a:pPr indent="0" marL="0">
@@ -6712,7 +6968,9 @@
           <a:ln/>
         </p:spPr>
         <p:txBody>
-          <a:bodyPr wrap="square" rtlCol="0" anchor="t"/>
+          <a:bodyPr wrap="square" rtlCol="0" anchor="t">
+            <a:normAutofit/>
+          </a:bodyPr>
           <a:lstStyle/>
           <a:p>
             <a:pPr indent="0" marL="0">
@@ -6751,7 +7009,9 @@
           <a:ln/>
         </p:spPr>
         <p:txBody>
-          <a:bodyPr wrap="square" rtlCol="0" anchor="ctr"/>
+          <a:bodyPr wrap="square" rtlCol="0" anchor="ctr">
+            <a:normAutofit/>
+          </a:bodyPr>
           <a:lstStyle/>
           <a:p>
             <a:pPr indent="0" marL="0">
@@ -6790,7 +7050,9 @@
           <a:ln/>
         </p:spPr>
         <p:txBody>
-          <a:bodyPr wrap="square" rtlCol="0" anchor="t"/>
+          <a:bodyPr wrap="square" rtlCol="0" anchor="t">
+            <a:normAutofit/>
+          </a:bodyPr>
           <a:lstStyle/>
           <a:p>
             <a:pPr indent="0" marL="0">
@@ -6829,7 +7091,9 @@
           <a:ln/>
         </p:spPr>
         <p:txBody>
-          <a:bodyPr wrap="square" rtlCol="0" anchor="ctr"/>
+          <a:bodyPr wrap="square" rtlCol="0" anchor="ctr">
+            <a:normAutofit/>
+          </a:bodyPr>
           <a:lstStyle/>
           <a:p>
             <a:pPr indent="0" marL="0">
@@ -6868,7 +7132,9 @@
           <a:ln/>
         </p:spPr>
         <p:txBody>
-          <a:bodyPr wrap="square" rtlCol="0" anchor="t"/>
+          <a:bodyPr wrap="square" rtlCol="0" anchor="t">
+            <a:normAutofit/>
+          </a:bodyPr>
           <a:lstStyle/>
           <a:p>
             <a:pPr indent="0" marL="0">
@@ -6916,7 +7182,9 @@
           </a:ln>
         </p:spPr>
         <p:txBody>
-          <a:bodyPr/>
+          <a:bodyPr wrap="square">
+            <a:normAutofit/>
+          </a:bodyPr>
           <a:p/>
         </p:txBody>
       </p:sp>
@@ -6938,7 +7206,9 @@
           <a:ln/>
         </p:spPr>
         <p:txBody>
-          <a:bodyPr wrap="square" rtlCol="0" anchor="ctr"/>
+          <a:bodyPr wrap="square" rtlCol="0" anchor="ctr">
+            <a:normAutofit/>
+          </a:bodyPr>
           <a:lstStyle/>
           <a:p>
             <a:pPr indent="0" marL="0">
@@ -6977,7 +7247,9 @@
           <a:ln/>
         </p:spPr>
         <p:txBody>
-          <a:bodyPr wrap="square" rtlCol="0" anchor="t"/>
+          <a:bodyPr wrap="square" rtlCol="0" anchor="t">
+            <a:normAutofit/>
+          </a:bodyPr>
           <a:lstStyle/>
           <a:p>
             <a:pPr indent="0" marL="0">
@@ -7016,7 +7288,9 @@
           <a:ln/>
         </p:spPr>
         <p:txBody>
-          <a:bodyPr wrap="square" rtlCol="0" anchor="t"/>
+          <a:bodyPr wrap="square" rtlCol="0" anchor="t">
+            <a:normAutofit/>
+          </a:bodyPr>
           <a:lstStyle/>
           <a:p>
             <a:pPr indent="0" marL="0">
@@ -7055,7 +7329,9 @@
           <a:ln/>
         </p:spPr>
         <p:txBody>
-          <a:bodyPr wrap="square" rtlCol="0" anchor="t"/>
+          <a:bodyPr wrap="square" rtlCol="0" anchor="t">
+            <a:normAutofit/>
+          </a:bodyPr>
           <a:lstStyle/>
           <a:p>
             <a:pPr indent="0" marL="0">
@@ -7094,7 +7370,9 @@
           <a:ln/>
         </p:spPr>
         <p:txBody>
-          <a:bodyPr wrap="square" rtlCol="0" anchor="ctr"/>
+          <a:bodyPr wrap="square" rtlCol="0" anchor="ctr">
+            <a:normAutofit/>
+          </a:bodyPr>
           <a:lstStyle/>
           <a:p>
             <a:pPr algn="r" indent="0" marL="0">

--- a/pptx_sessions_8_22/第14回_基礎編_受講者用.pptx
+++ b/pptx_sessions_8_22/第14回_基礎編_受講者用.pptx
@@ -1531,9 +1531,7 @@
           </a:ln>
         </p:spPr>
         <p:txBody>
-          <a:bodyPr wrap="square">
-            <a:normAutofit/>
-          </a:bodyPr>
+          <a:bodyPr/>
           <a:p/>
         </p:txBody>
       </p:sp>
@@ -1562,9 +1560,7 @@
           </a:ln>
         </p:spPr>
         <p:txBody>
-          <a:bodyPr wrap="square">
-            <a:normAutofit/>
-          </a:bodyPr>
+          <a:bodyPr/>
           <a:p/>
         </p:txBody>
       </p:sp>
@@ -1586,9 +1582,7 @@
           <a:ln/>
         </p:spPr>
         <p:txBody>
-          <a:bodyPr wrap="square" rtlCol="0" anchor="ctr">
-            <a:normAutofit/>
-          </a:bodyPr>
+          <a:bodyPr wrap="square" rtlCol="0" anchor="ctr"/>
           <a:lstStyle/>
           <a:p>
             <a:pPr algn="ctr" indent="0" marL="0">
@@ -1627,9 +1621,7 @@
           <a:ln/>
         </p:spPr>
         <p:txBody>
-          <a:bodyPr wrap="square" rtlCol="0" anchor="ctr">
-            <a:normAutofit/>
-          </a:bodyPr>
+          <a:bodyPr wrap="square" rtlCol="0" anchor="ctr"/>
           <a:lstStyle/>
           <a:p>
             <a:pPr algn="ctr" indent="0" marL="0">
@@ -1668,9 +1660,7 @@
           <a:ln/>
         </p:spPr>
         <p:txBody>
-          <a:bodyPr wrap="square" rtlCol="0" anchor="ctr">
-            <a:normAutofit/>
-          </a:bodyPr>
+          <a:bodyPr wrap="square" rtlCol="0" anchor="ctr"/>
           <a:lstStyle/>
           <a:p>
             <a:pPr algn="ctr" indent="0" marL="0">
@@ -1709,9 +1699,7 @@
           <a:ln/>
         </p:spPr>
         <p:txBody>
-          <a:bodyPr wrap="square" rtlCol="0" anchor="ctr">
-            <a:normAutofit/>
-          </a:bodyPr>
+          <a:bodyPr wrap="square" rtlCol="0" anchor="ctr"/>
           <a:lstStyle/>
           <a:p>
             <a:pPr algn="ctr" indent="0" marL="0">
@@ -1759,9 +1747,7 @@
           </a:ln>
         </p:spPr>
         <p:txBody>
-          <a:bodyPr wrap="square">
-            <a:normAutofit/>
-          </a:bodyPr>
+          <a:bodyPr/>
           <a:p/>
         </p:txBody>
       </p:sp>
@@ -1783,9 +1769,7 @@
           <a:ln/>
         </p:spPr>
         <p:txBody>
-          <a:bodyPr wrap="square" rtlCol="0" anchor="ctr">
-            <a:normAutofit/>
-          </a:bodyPr>
+          <a:bodyPr wrap="square" rtlCol="0" anchor="ctr"/>
           <a:lstStyle/>
           <a:p>
             <a:pPr algn="ctr" indent="0" marL="0">
@@ -1856,9 +1840,7 @@
           </a:ln>
         </p:spPr>
         <p:txBody>
-          <a:bodyPr wrap="square">
-            <a:normAutofit/>
-          </a:bodyPr>
+          <a:bodyPr/>
           <a:p/>
         </p:txBody>
       </p:sp>
@@ -1887,9 +1869,7 @@
           </a:ln>
         </p:spPr>
         <p:txBody>
-          <a:bodyPr wrap="square">
-            <a:normAutofit/>
-          </a:bodyPr>
+          <a:bodyPr/>
           <a:p/>
         </p:txBody>
       </p:sp>
@@ -1911,9 +1891,7 @@
           <a:ln/>
         </p:spPr>
         <p:txBody>
-          <a:bodyPr wrap="square" rtlCol="0" anchor="ctr">
-            <a:normAutofit/>
-          </a:bodyPr>
+          <a:bodyPr wrap="square" rtlCol="0" anchor="ctr"/>
           <a:lstStyle/>
           <a:p>
             <a:pPr indent="0" marL="0">
@@ -1952,9 +1930,7 @@
           <a:ln/>
         </p:spPr>
         <p:txBody>
-          <a:bodyPr wrap="square" rtlCol="0" anchor="ctr">
-            <a:normAutofit/>
-          </a:bodyPr>
+          <a:bodyPr wrap="square" rtlCol="0" anchor="ctr"/>
           <a:lstStyle/>
           <a:p>
             <a:pPr indent="0" marL="0">
@@ -2002,9 +1978,7 @@
           </a:ln>
         </p:spPr>
         <p:txBody>
-          <a:bodyPr wrap="square">
-            <a:normAutofit/>
-          </a:bodyPr>
+          <a:bodyPr/>
           <a:p/>
         </p:txBody>
       </p:sp>
@@ -2026,9 +2000,7 @@
           <a:ln/>
         </p:spPr>
         <p:txBody>
-          <a:bodyPr wrap="square" rtlCol="0" anchor="ctr">
-            <a:normAutofit/>
-          </a:bodyPr>
+          <a:bodyPr wrap="square" rtlCol="0" anchor="ctr"/>
           <a:lstStyle/>
           <a:p>
             <a:pPr indent="0" marL="0">
@@ -2067,9 +2039,7 @@
           <a:ln/>
         </p:spPr>
         <p:txBody>
-          <a:bodyPr wrap="square" rtlCol="0" anchor="ctr">
-            <a:normAutofit/>
-          </a:bodyPr>
+          <a:bodyPr wrap="square" rtlCol="0" anchor="ctr"/>
           <a:lstStyle/>
           <a:p>
             <a:pPr indent="0" marL="0">
@@ -2108,9 +2078,7 @@
           <a:ln/>
         </p:spPr>
         <p:txBody>
-          <a:bodyPr wrap="square" rtlCol="0" anchor="ctr">
-            <a:normAutofit/>
-          </a:bodyPr>
+          <a:bodyPr wrap="square" rtlCol="0" anchor="ctr"/>
           <a:lstStyle/>
           <a:p>
             <a:pPr indent="0" marL="0">
@@ -2158,9 +2126,7 @@
           </a:ln>
         </p:spPr>
         <p:txBody>
-          <a:bodyPr wrap="square">
-            <a:normAutofit/>
-          </a:bodyPr>
+          <a:bodyPr/>
           <a:p/>
         </p:txBody>
       </p:sp>
@@ -2182,9 +2148,7 @@
           <a:ln/>
         </p:spPr>
         <p:txBody>
-          <a:bodyPr wrap="square" rtlCol="0" anchor="ctr">
-            <a:normAutofit/>
-          </a:bodyPr>
+          <a:bodyPr wrap="square" rtlCol="0" anchor="ctr"/>
           <a:lstStyle/>
           <a:p>
             <a:pPr indent="0" marL="0">
@@ -2223,9 +2187,7 @@
           <a:ln/>
         </p:spPr>
         <p:txBody>
-          <a:bodyPr wrap="square" rtlCol="0" anchor="ctr">
-            <a:normAutofit/>
-          </a:bodyPr>
+          <a:bodyPr wrap="square" rtlCol="0" anchor="ctr"/>
           <a:lstStyle/>
           <a:p>
             <a:pPr indent="0" marL="0">
@@ -2264,9 +2226,7 @@
           <a:ln/>
         </p:spPr>
         <p:txBody>
-          <a:bodyPr wrap="square" rtlCol="0" anchor="ctr">
-            <a:normAutofit/>
-          </a:bodyPr>
+          <a:bodyPr wrap="square" rtlCol="0" anchor="ctr"/>
           <a:lstStyle/>
           <a:p>
             <a:pPr indent="0" marL="0">
@@ -2314,9 +2274,7 @@
           </a:ln>
         </p:spPr>
         <p:txBody>
-          <a:bodyPr wrap="square">
-            <a:normAutofit/>
-          </a:bodyPr>
+          <a:bodyPr/>
           <a:p/>
         </p:txBody>
       </p:sp>
@@ -2338,9 +2296,7 @@
           <a:ln/>
         </p:spPr>
         <p:txBody>
-          <a:bodyPr wrap="square" rtlCol="0" anchor="ctr">
-            <a:normAutofit/>
-          </a:bodyPr>
+          <a:bodyPr wrap="square" rtlCol="0" anchor="ctr"/>
           <a:lstStyle/>
           <a:p>
             <a:pPr indent="0" marL="0">
@@ -2379,9 +2335,7 @@
           <a:ln/>
         </p:spPr>
         <p:txBody>
-          <a:bodyPr wrap="square" rtlCol="0" anchor="ctr">
-            <a:normAutofit/>
-          </a:bodyPr>
+          <a:bodyPr wrap="square" rtlCol="0" anchor="ctr"/>
           <a:lstStyle/>
           <a:p>
             <a:pPr indent="0" marL="0">
@@ -2420,9 +2374,7 @@
           <a:ln/>
         </p:spPr>
         <p:txBody>
-          <a:bodyPr wrap="square" rtlCol="0" anchor="ctr">
-            <a:normAutofit/>
-          </a:bodyPr>
+          <a:bodyPr wrap="square" rtlCol="0" anchor="ctr"/>
           <a:lstStyle/>
           <a:p>
             <a:pPr indent="0" marL="0">
@@ -2461,9 +2413,7 @@
           <a:ln/>
         </p:spPr>
         <p:txBody>
-          <a:bodyPr wrap="square" rtlCol="0" anchor="ctr">
-            <a:normAutofit/>
-          </a:bodyPr>
+          <a:bodyPr wrap="square" rtlCol="0" anchor="ctr"/>
           <a:lstStyle/>
           <a:p>
             <a:pPr algn="r" indent="0" marL="0">
@@ -2534,9 +2484,7 @@
           </a:ln>
         </p:spPr>
         <p:txBody>
-          <a:bodyPr wrap="square">
-            <a:normAutofit/>
-          </a:bodyPr>
+          <a:bodyPr/>
           <a:p/>
         </p:txBody>
       </p:sp>
@@ -2565,9 +2513,7 @@
           </a:ln>
         </p:spPr>
         <p:txBody>
-          <a:bodyPr wrap="square">
-            <a:normAutofit/>
-          </a:bodyPr>
+          <a:bodyPr/>
           <a:p/>
         </p:txBody>
       </p:sp>
@@ -2589,9 +2535,7 @@
           <a:ln/>
         </p:spPr>
         <p:txBody>
-          <a:bodyPr wrap="square" rtlCol="0" anchor="ctr">
-            <a:normAutofit/>
-          </a:bodyPr>
+          <a:bodyPr wrap="square" rtlCol="0" anchor="ctr"/>
           <a:lstStyle/>
           <a:p>
             <a:pPr indent="0" marL="0">
@@ -2630,9 +2574,7 @@
           <a:ln/>
         </p:spPr>
         <p:txBody>
-          <a:bodyPr wrap="square" rtlCol="0" anchor="ctr">
-            <a:normAutofit/>
-          </a:bodyPr>
+          <a:bodyPr wrap="square" rtlCol="0" anchor="ctr"/>
           <a:lstStyle/>
           <a:p>
             <a:pPr indent="0" marL="0">
@@ -2678,9 +2620,7 @@
           </a:ln>
         </p:spPr>
         <p:txBody>
-          <a:bodyPr wrap="square">
-            <a:normAutofit/>
-          </a:bodyPr>
+          <a:bodyPr/>
           <a:p/>
         </p:txBody>
       </p:sp>
@@ -2711,9 +2651,7 @@
           </a:ln>
         </p:spPr>
         <p:txBody>
-          <a:bodyPr wrap="square">
-            <a:normAutofit/>
-          </a:bodyPr>
+          <a:bodyPr/>
           <a:p/>
         </p:txBody>
       </p:sp>
@@ -2735,9 +2673,7 @@
           <a:ln/>
         </p:spPr>
         <p:txBody>
-          <a:bodyPr wrap="square" rtlCol="0" anchor="ctr">
-            <a:normAutofit/>
-          </a:bodyPr>
+          <a:bodyPr wrap="square" rtlCol="0" anchor="ctr"/>
           <a:lstStyle/>
           <a:p>
             <a:pPr algn="ctr" indent="0" marL="0">
@@ -2776,9 +2712,7 @@
           <a:ln/>
         </p:spPr>
         <p:txBody>
-          <a:bodyPr wrap="square" rtlCol="0" anchor="ctr">
-            <a:normAutofit/>
-          </a:bodyPr>
+          <a:bodyPr wrap="square" rtlCol="0" anchor="ctr"/>
           <a:lstStyle/>
           <a:p>
             <a:pPr indent="0" marL="0">
@@ -2824,9 +2758,7 @@
           </a:ln>
         </p:spPr>
         <p:txBody>
-          <a:bodyPr wrap="square">
-            <a:normAutofit/>
-          </a:bodyPr>
+          <a:bodyPr/>
           <a:p/>
         </p:txBody>
       </p:sp>
@@ -2857,9 +2789,7 @@
           </a:ln>
         </p:spPr>
         <p:txBody>
-          <a:bodyPr wrap="square">
-            <a:normAutofit/>
-          </a:bodyPr>
+          <a:bodyPr/>
           <a:p/>
         </p:txBody>
       </p:sp>
@@ -2881,9 +2811,7 @@
           <a:ln/>
         </p:spPr>
         <p:txBody>
-          <a:bodyPr wrap="square" rtlCol="0" anchor="ctr">
-            <a:normAutofit/>
-          </a:bodyPr>
+          <a:bodyPr wrap="square" rtlCol="0" anchor="ctr"/>
           <a:lstStyle/>
           <a:p>
             <a:pPr algn="ctr" indent="0" marL="0">
@@ -2922,9 +2850,7 @@
           <a:ln/>
         </p:spPr>
         <p:txBody>
-          <a:bodyPr wrap="square" rtlCol="0" anchor="ctr">
-            <a:normAutofit/>
-          </a:bodyPr>
+          <a:bodyPr wrap="square" rtlCol="0" anchor="ctr"/>
           <a:lstStyle/>
           <a:p>
             <a:pPr indent="0" marL="0">
@@ -2963,9 +2889,7 @@
           <a:ln/>
         </p:spPr>
         <p:txBody>
-          <a:bodyPr wrap="square" rtlCol="0" anchor="ctr">
-            <a:normAutofit/>
-          </a:bodyPr>
+          <a:bodyPr wrap="square" rtlCol="0" anchor="ctr"/>
           <a:lstStyle/>
           <a:p>
             <a:pPr indent="0" marL="0">
@@ -3013,9 +2937,7 @@
           </a:ln>
         </p:spPr>
         <p:txBody>
-          <a:bodyPr wrap="square">
-            <a:normAutofit/>
-          </a:bodyPr>
+          <a:bodyPr/>
           <a:p/>
         </p:txBody>
       </p:sp>
@@ -3046,9 +2968,7 @@
           </a:ln>
         </p:spPr>
         <p:txBody>
-          <a:bodyPr wrap="square">
-            <a:normAutofit/>
-          </a:bodyPr>
+          <a:bodyPr/>
           <a:p/>
         </p:txBody>
       </p:sp>
@@ -3070,9 +2990,7 @@
           <a:ln/>
         </p:spPr>
         <p:txBody>
-          <a:bodyPr wrap="square" rtlCol="0" anchor="ctr">
-            <a:normAutofit/>
-          </a:bodyPr>
+          <a:bodyPr wrap="square" rtlCol="0" anchor="ctr"/>
           <a:lstStyle/>
           <a:p>
             <a:pPr algn="ctr" indent="0" marL="0">
@@ -3111,9 +3029,7 @@
           <a:ln/>
         </p:spPr>
         <p:txBody>
-          <a:bodyPr wrap="square" rtlCol="0" anchor="ctr">
-            <a:normAutofit/>
-          </a:bodyPr>
+          <a:bodyPr wrap="square" rtlCol="0" anchor="ctr"/>
           <a:lstStyle/>
           <a:p>
             <a:pPr indent="0" marL="0">
@@ -3161,9 +3077,7 @@
           </a:ln>
         </p:spPr>
         <p:txBody>
-          <a:bodyPr wrap="square">
-            <a:normAutofit/>
-          </a:bodyPr>
+          <a:bodyPr/>
           <a:p/>
         </p:txBody>
       </p:sp>
@@ -3194,9 +3108,7 @@
           </a:ln>
         </p:spPr>
         <p:txBody>
-          <a:bodyPr wrap="square">
-            <a:normAutofit/>
-          </a:bodyPr>
+          <a:bodyPr/>
           <a:p/>
         </p:txBody>
       </p:sp>
@@ -3218,9 +3130,7 @@
           <a:ln/>
         </p:spPr>
         <p:txBody>
-          <a:bodyPr wrap="square" rtlCol="0" anchor="ctr">
-            <a:normAutofit/>
-          </a:bodyPr>
+          <a:bodyPr wrap="square" rtlCol="0" anchor="ctr"/>
           <a:lstStyle/>
           <a:p>
             <a:pPr algn="ctr" indent="0" marL="0">
@@ -3259,9 +3169,7 @@
           <a:ln/>
         </p:spPr>
         <p:txBody>
-          <a:bodyPr wrap="square" rtlCol="0" anchor="ctr">
-            <a:normAutofit/>
-          </a:bodyPr>
+          <a:bodyPr wrap="square" rtlCol="0" anchor="ctr"/>
           <a:lstStyle/>
           <a:p>
             <a:pPr indent="0" marL="0">
@@ -3309,9 +3217,7 @@
           </a:ln>
         </p:spPr>
         <p:txBody>
-          <a:bodyPr wrap="square">
-            <a:normAutofit/>
-          </a:bodyPr>
+          <a:bodyPr/>
           <a:p/>
         </p:txBody>
       </p:sp>
@@ -3342,9 +3248,7 @@
           </a:ln>
         </p:spPr>
         <p:txBody>
-          <a:bodyPr wrap="square">
-            <a:normAutofit/>
-          </a:bodyPr>
+          <a:bodyPr/>
           <a:p/>
         </p:txBody>
       </p:sp>
@@ -3366,9 +3270,7 @@
           <a:ln/>
         </p:spPr>
         <p:txBody>
-          <a:bodyPr wrap="square" rtlCol="0" anchor="ctr">
-            <a:normAutofit/>
-          </a:bodyPr>
+          <a:bodyPr wrap="square" rtlCol="0" anchor="ctr"/>
           <a:lstStyle/>
           <a:p>
             <a:pPr algn="ctr" indent="0" marL="0">
@@ -3407,9 +3309,7 @@
           <a:ln/>
         </p:spPr>
         <p:txBody>
-          <a:bodyPr wrap="square" rtlCol="0" anchor="ctr">
-            <a:normAutofit/>
-          </a:bodyPr>
+          <a:bodyPr wrap="square" rtlCol="0" anchor="ctr"/>
           <a:lstStyle/>
           <a:p>
             <a:pPr indent="0" marL="0">
@@ -3457,9 +3357,7 @@
           </a:ln>
         </p:spPr>
         <p:txBody>
-          <a:bodyPr wrap="square">
-            <a:normAutofit/>
-          </a:bodyPr>
+          <a:bodyPr/>
           <a:p/>
         </p:txBody>
       </p:sp>
@@ -3490,9 +3388,7 @@
           </a:ln>
         </p:spPr>
         <p:txBody>
-          <a:bodyPr wrap="square">
-            <a:normAutofit/>
-          </a:bodyPr>
+          <a:bodyPr/>
           <a:p/>
         </p:txBody>
       </p:sp>
@@ -3514,9 +3410,7 @@
           <a:ln/>
         </p:spPr>
         <p:txBody>
-          <a:bodyPr wrap="square" rtlCol="0" anchor="ctr">
-            <a:normAutofit/>
-          </a:bodyPr>
+          <a:bodyPr wrap="square" rtlCol="0" anchor="ctr"/>
           <a:lstStyle/>
           <a:p>
             <a:pPr algn="ctr" indent="0" marL="0">
@@ -3555,9 +3449,7 @@
           <a:ln/>
         </p:spPr>
         <p:txBody>
-          <a:bodyPr wrap="square" rtlCol="0" anchor="ctr">
-            <a:normAutofit/>
-          </a:bodyPr>
+          <a:bodyPr wrap="square" rtlCol="0" anchor="ctr"/>
           <a:lstStyle/>
           <a:p>
             <a:pPr indent="0" marL="0">
@@ -3605,9 +3497,7 @@
           </a:ln>
         </p:spPr>
         <p:txBody>
-          <a:bodyPr wrap="square">
-            <a:normAutofit/>
-          </a:bodyPr>
+          <a:bodyPr/>
           <a:p/>
         </p:txBody>
       </p:sp>
@@ -3638,9 +3528,7 @@
           </a:ln>
         </p:spPr>
         <p:txBody>
-          <a:bodyPr wrap="square">
-            <a:normAutofit/>
-          </a:bodyPr>
+          <a:bodyPr/>
           <a:p/>
         </p:txBody>
       </p:sp>
@@ -3662,9 +3550,7 @@
           <a:ln/>
         </p:spPr>
         <p:txBody>
-          <a:bodyPr wrap="square" rtlCol="0" anchor="ctr">
-            <a:normAutofit/>
-          </a:bodyPr>
+          <a:bodyPr wrap="square" rtlCol="0" anchor="ctr"/>
           <a:lstStyle/>
           <a:p>
             <a:pPr algn="ctr" indent="0" marL="0">
@@ -3703,9 +3589,7 @@
           <a:ln/>
         </p:spPr>
         <p:txBody>
-          <a:bodyPr wrap="square" rtlCol="0" anchor="ctr">
-            <a:normAutofit/>
-          </a:bodyPr>
+          <a:bodyPr wrap="square" rtlCol="0" anchor="ctr"/>
           <a:lstStyle/>
           <a:p>
             <a:pPr indent="0" marL="0">
@@ -3744,9 +3628,7 @@
           <a:ln/>
         </p:spPr>
         <p:txBody>
-          <a:bodyPr wrap="square" rtlCol="0" anchor="ctr">
-            <a:normAutofit/>
-          </a:bodyPr>
+          <a:bodyPr wrap="square" rtlCol="0" anchor="ctr"/>
           <a:lstStyle/>
           <a:p>
             <a:pPr algn="r" indent="0" marL="0">
@@ -3817,9 +3699,7 @@
           </a:ln>
         </p:spPr>
         <p:txBody>
-          <a:bodyPr wrap="square">
-            <a:normAutofit/>
-          </a:bodyPr>
+          <a:bodyPr/>
           <a:p/>
         </p:txBody>
       </p:sp>
@@ -3848,9 +3728,7 @@
           </a:ln>
         </p:spPr>
         <p:txBody>
-          <a:bodyPr wrap="square">
-            <a:normAutofit/>
-          </a:bodyPr>
+          <a:bodyPr/>
           <a:p/>
         </p:txBody>
       </p:sp>
@@ -3881,9 +3759,7 @@
           </a:ln>
         </p:spPr>
         <p:txBody>
-          <a:bodyPr wrap="square">
-            <a:normAutofit/>
-          </a:bodyPr>
+          <a:bodyPr/>
           <a:p/>
         </p:txBody>
       </p:sp>
@@ -3905,9 +3781,7 @@
           <a:ln/>
         </p:spPr>
         <p:txBody>
-          <a:bodyPr wrap="square" rtlCol="0" anchor="ctr">
-            <a:normAutofit/>
-          </a:bodyPr>
+          <a:bodyPr wrap="square" rtlCol="0" anchor="ctr"/>
           <a:lstStyle/>
           <a:p>
             <a:pPr algn="ctr" indent="0" marL="0">
@@ -3946,9 +3820,7 @@
           <a:ln/>
         </p:spPr>
         <p:txBody>
-          <a:bodyPr wrap="square" rtlCol="0" anchor="ctr">
-            <a:normAutofit/>
-          </a:bodyPr>
+          <a:bodyPr wrap="square" rtlCol="0" anchor="ctr"/>
           <a:lstStyle/>
           <a:p>
             <a:pPr indent="0" marL="0">
@@ -3987,9 +3859,7 @@
           <a:ln/>
         </p:spPr>
         <p:txBody>
-          <a:bodyPr wrap="square" rtlCol="0" anchor="ctr">
-            <a:normAutofit/>
-          </a:bodyPr>
+          <a:bodyPr wrap="square" rtlCol="0" anchor="ctr"/>
           <a:lstStyle/>
           <a:p>
             <a:pPr indent="0" marL="0">
@@ -4037,9 +3907,7 @@
           </a:ln>
         </p:spPr>
         <p:txBody>
-          <a:bodyPr wrap="square">
-            <a:normAutofit/>
-          </a:bodyPr>
+          <a:bodyPr/>
           <a:p/>
         </p:txBody>
       </p:sp>
@@ -4061,9 +3929,7 @@
           <a:ln/>
         </p:spPr>
         <p:txBody>
-          <a:bodyPr wrap="square" rtlCol="0" anchor="ctr">
-            <a:normAutofit/>
-          </a:bodyPr>
+          <a:bodyPr wrap="square" rtlCol="0" anchor="ctr"/>
           <a:lstStyle/>
           <a:p>
             <a:pPr indent="0" marL="0">
@@ -4102,9 +3968,7 @@
           <a:ln/>
         </p:spPr>
         <p:txBody>
-          <a:bodyPr wrap="square" rtlCol="0" anchor="t">
-            <a:normAutofit/>
-          </a:bodyPr>
+          <a:bodyPr wrap="square" rtlCol="0" anchor="t"/>
           <a:lstStyle/>
           <a:p>
             <a:pPr indent="0" marL="0">
@@ -4296,9 +4160,7 @@
           <a:ln/>
         </p:spPr>
         <p:txBody>
-          <a:bodyPr wrap="square" rtlCol="0" anchor="ctr">
-            <a:normAutofit/>
-          </a:bodyPr>
+          <a:bodyPr wrap="square" rtlCol="0" anchor="ctr"/>
           <a:lstStyle/>
           <a:p>
             <a:pPr algn="r" indent="0" marL="0">
@@ -4369,9 +4231,7 @@
           </a:ln>
         </p:spPr>
         <p:txBody>
-          <a:bodyPr wrap="square">
-            <a:normAutofit/>
-          </a:bodyPr>
+          <a:bodyPr/>
           <a:p/>
         </p:txBody>
       </p:sp>
@@ -4400,9 +4260,7 @@
           </a:ln>
         </p:spPr>
         <p:txBody>
-          <a:bodyPr wrap="square">
-            <a:normAutofit/>
-          </a:bodyPr>
+          <a:bodyPr/>
           <a:p/>
         </p:txBody>
       </p:sp>
@@ -4433,9 +4291,7 @@
           </a:ln>
         </p:spPr>
         <p:txBody>
-          <a:bodyPr wrap="square">
-            <a:normAutofit/>
-          </a:bodyPr>
+          <a:bodyPr/>
           <a:p/>
         </p:txBody>
       </p:sp>
@@ -4457,9 +4313,7 @@
           <a:ln/>
         </p:spPr>
         <p:txBody>
-          <a:bodyPr wrap="square" rtlCol="0" anchor="ctr">
-            <a:normAutofit/>
-          </a:bodyPr>
+          <a:bodyPr wrap="square" rtlCol="0" anchor="ctr"/>
           <a:lstStyle/>
           <a:p>
             <a:pPr algn="ctr" indent="0" marL="0">
@@ -4498,9 +4352,7 @@
           <a:ln/>
         </p:spPr>
         <p:txBody>
-          <a:bodyPr wrap="square" rtlCol="0" anchor="ctr">
-            <a:normAutofit/>
-          </a:bodyPr>
+          <a:bodyPr wrap="square" rtlCol="0" anchor="ctr"/>
           <a:lstStyle/>
           <a:p>
             <a:pPr indent="0" marL="0">
@@ -4539,9 +4391,7 @@
           <a:ln/>
         </p:spPr>
         <p:txBody>
-          <a:bodyPr wrap="square" rtlCol="0" anchor="ctr">
-            <a:normAutofit/>
-          </a:bodyPr>
+          <a:bodyPr wrap="square" rtlCol="0" anchor="ctr"/>
           <a:lstStyle/>
           <a:p>
             <a:pPr indent="0" marL="0">
@@ -4589,9 +4439,7 @@
           </a:ln>
         </p:spPr>
         <p:txBody>
-          <a:bodyPr wrap="square">
-            <a:normAutofit/>
-          </a:bodyPr>
+          <a:bodyPr/>
           <a:p/>
         </p:txBody>
       </p:sp>
@@ -4613,9 +4461,7 @@
           <a:ln/>
         </p:spPr>
         <p:txBody>
-          <a:bodyPr wrap="square" rtlCol="0" anchor="ctr">
-            <a:normAutofit/>
-          </a:bodyPr>
+          <a:bodyPr wrap="square" rtlCol="0" anchor="ctr"/>
           <a:lstStyle/>
           <a:p>
             <a:pPr indent="0" marL="0">
@@ -4654,9 +4500,7 @@
           <a:ln/>
         </p:spPr>
         <p:txBody>
-          <a:bodyPr wrap="square" rtlCol="0" anchor="ctr">
-            <a:normAutofit/>
-          </a:bodyPr>
+          <a:bodyPr wrap="square" rtlCol="0" anchor="ctr"/>
           <a:lstStyle/>
           <a:p>
             <a:pPr indent="0" marL="0">
@@ -4695,9 +4539,7 @@
           <a:ln/>
         </p:spPr>
         <p:txBody>
-          <a:bodyPr wrap="square" rtlCol="0" anchor="t">
-            <a:normAutofit/>
-          </a:bodyPr>
+          <a:bodyPr wrap="square" rtlCol="0" anchor="t"/>
           <a:lstStyle/>
           <a:p>
             <a:pPr indent="0" marL="0">
@@ -4736,9 +4578,7 @@
           <a:ln/>
         </p:spPr>
         <p:txBody>
-          <a:bodyPr wrap="square" rtlCol="0" anchor="ctr">
-            <a:normAutofit/>
-          </a:bodyPr>
+          <a:bodyPr wrap="square" rtlCol="0" anchor="ctr"/>
           <a:lstStyle/>
           <a:p>
             <a:pPr indent="0" marL="0">
@@ -4777,9 +4617,7 @@
           <a:ln/>
         </p:spPr>
         <p:txBody>
-          <a:bodyPr wrap="square" rtlCol="0" anchor="t">
-            <a:normAutofit/>
-          </a:bodyPr>
+          <a:bodyPr wrap="square" rtlCol="0" anchor="t"/>
           <a:lstStyle/>
           <a:p>
             <a:pPr indent="0" marL="0">
@@ -4818,9 +4656,7 @@
           <a:ln/>
         </p:spPr>
         <p:txBody>
-          <a:bodyPr wrap="square" rtlCol="0" anchor="ctr">
-            <a:normAutofit/>
-          </a:bodyPr>
+          <a:bodyPr wrap="square" rtlCol="0" anchor="ctr"/>
           <a:lstStyle/>
           <a:p>
             <a:pPr indent="0" marL="0">
@@ -4859,9 +4695,7 @@
           <a:ln/>
         </p:spPr>
         <p:txBody>
-          <a:bodyPr wrap="square" rtlCol="0" anchor="t">
-            <a:normAutofit/>
-          </a:bodyPr>
+          <a:bodyPr wrap="square" rtlCol="0" anchor="t"/>
           <a:lstStyle/>
           <a:p>
             <a:pPr indent="0" marL="0">
@@ -4909,9 +4743,7 @@
           </a:ln>
         </p:spPr>
         <p:txBody>
-          <a:bodyPr wrap="square">
-            <a:normAutofit/>
-          </a:bodyPr>
+          <a:bodyPr/>
           <a:p/>
         </p:txBody>
       </p:sp>
@@ -4933,9 +4765,7 @@
           <a:ln/>
         </p:spPr>
         <p:txBody>
-          <a:bodyPr wrap="square" rtlCol="0" anchor="ctr">
-            <a:normAutofit/>
-          </a:bodyPr>
+          <a:bodyPr wrap="square" rtlCol="0" anchor="ctr"/>
           <a:lstStyle/>
           <a:p>
             <a:pPr indent="0" marL="0">
@@ -4974,9 +4804,7 @@
           <a:ln/>
         </p:spPr>
         <p:txBody>
-          <a:bodyPr wrap="square" rtlCol="0" anchor="t">
-            <a:normAutofit/>
-          </a:bodyPr>
+          <a:bodyPr wrap="square" rtlCol="0" anchor="t"/>
           <a:lstStyle/>
           <a:p>
             <a:pPr indent="0" marL="0">
@@ -5015,9 +4843,7 @@
           <a:ln/>
         </p:spPr>
         <p:txBody>
-          <a:bodyPr wrap="square" rtlCol="0" anchor="t">
-            <a:normAutofit/>
-          </a:bodyPr>
+          <a:bodyPr wrap="square" rtlCol="0" anchor="t"/>
           <a:lstStyle/>
           <a:p>
             <a:pPr indent="0" marL="0">
@@ -5056,9 +4882,7 @@
           <a:ln/>
         </p:spPr>
         <p:txBody>
-          <a:bodyPr wrap="square" rtlCol="0" anchor="t">
-            <a:normAutofit/>
-          </a:bodyPr>
+          <a:bodyPr wrap="square" rtlCol="0" anchor="t"/>
           <a:lstStyle/>
           <a:p>
             <a:pPr indent="0" marL="0">
@@ -5097,9 +4921,7 @@
           <a:ln/>
         </p:spPr>
         <p:txBody>
-          <a:bodyPr wrap="square" rtlCol="0" anchor="ctr">
-            <a:normAutofit/>
-          </a:bodyPr>
+          <a:bodyPr wrap="square" rtlCol="0" anchor="ctr"/>
           <a:lstStyle/>
           <a:p>
             <a:pPr algn="r" indent="0" marL="0">
@@ -5170,9 +4992,7 @@
           </a:ln>
         </p:spPr>
         <p:txBody>
-          <a:bodyPr wrap="square">
-            <a:normAutofit/>
-          </a:bodyPr>
+          <a:bodyPr/>
           <a:p/>
         </p:txBody>
       </p:sp>
@@ -5201,9 +5021,7 @@
           </a:ln>
         </p:spPr>
         <p:txBody>
-          <a:bodyPr wrap="square">
-            <a:normAutofit/>
-          </a:bodyPr>
+          <a:bodyPr/>
           <a:p/>
         </p:txBody>
       </p:sp>
@@ -5234,9 +5052,7 @@
           </a:ln>
         </p:spPr>
         <p:txBody>
-          <a:bodyPr wrap="square">
-            <a:normAutofit/>
-          </a:bodyPr>
+          <a:bodyPr/>
           <a:p/>
         </p:txBody>
       </p:sp>
@@ -5258,9 +5074,7 @@
           <a:ln/>
         </p:spPr>
         <p:txBody>
-          <a:bodyPr wrap="square" rtlCol="0" anchor="ctr">
-            <a:normAutofit/>
-          </a:bodyPr>
+          <a:bodyPr wrap="square" rtlCol="0" anchor="ctr"/>
           <a:lstStyle/>
           <a:p>
             <a:pPr algn="ctr" indent="0" marL="0">
@@ -5299,9 +5113,7 @@
           <a:ln/>
         </p:spPr>
         <p:txBody>
-          <a:bodyPr wrap="square" rtlCol="0" anchor="ctr">
-            <a:normAutofit/>
-          </a:bodyPr>
+          <a:bodyPr wrap="square" rtlCol="0" anchor="ctr"/>
           <a:lstStyle/>
           <a:p>
             <a:pPr indent="0" marL="0">
@@ -5340,9 +5152,7 @@
           <a:ln/>
         </p:spPr>
         <p:txBody>
-          <a:bodyPr wrap="square" rtlCol="0" anchor="ctr">
-            <a:normAutofit/>
-          </a:bodyPr>
+          <a:bodyPr wrap="square" rtlCol="0" anchor="ctr"/>
           <a:lstStyle/>
           <a:p>
             <a:pPr indent="0" marL="0">
@@ -5390,9 +5200,7 @@
           </a:ln>
         </p:spPr>
         <p:txBody>
-          <a:bodyPr wrap="square">
-            <a:normAutofit/>
-          </a:bodyPr>
+          <a:bodyPr/>
           <a:p/>
         </p:txBody>
       </p:sp>
@@ -5414,9 +5222,7 @@
           <a:ln/>
         </p:spPr>
         <p:txBody>
-          <a:bodyPr wrap="square" rtlCol="0" anchor="ctr">
-            <a:normAutofit/>
-          </a:bodyPr>
+          <a:bodyPr wrap="square" rtlCol="0" anchor="ctr"/>
           <a:lstStyle/>
           <a:p>
             <a:pPr indent="0" marL="0">
@@ -5455,9 +5261,7 @@
           <a:ln/>
         </p:spPr>
         <p:txBody>
-          <a:bodyPr wrap="square" rtlCol="0" anchor="t">
-            <a:normAutofit/>
-          </a:bodyPr>
+          <a:bodyPr wrap="square" rtlCol="0" anchor="t"/>
           <a:lstStyle/>
           <a:p>
             <a:pPr indent="0" marL="0">
@@ -5768,9 +5572,7 @@
           <a:ln/>
         </p:spPr>
         <p:txBody>
-          <a:bodyPr wrap="square" rtlCol="0" anchor="ctr">
-            <a:normAutofit/>
-          </a:bodyPr>
+          <a:bodyPr wrap="square" rtlCol="0" anchor="ctr"/>
           <a:lstStyle/>
           <a:p>
             <a:pPr algn="r" indent="0" marL="0">
@@ -5841,9 +5643,7 @@
           </a:ln>
         </p:spPr>
         <p:txBody>
-          <a:bodyPr wrap="square">
-            <a:normAutofit/>
-          </a:bodyPr>
+          <a:bodyPr/>
           <a:p/>
         </p:txBody>
       </p:sp>
@@ -5872,9 +5672,7 @@
           </a:ln>
         </p:spPr>
         <p:txBody>
-          <a:bodyPr wrap="square">
-            <a:normAutofit/>
-          </a:bodyPr>
+          <a:bodyPr/>
           <a:p/>
         </p:txBody>
       </p:sp>
@@ -5905,9 +5703,7 @@
           </a:ln>
         </p:spPr>
         <p:txBody>
-          <a:bodyPr wrap="square">
-            <a:normAutofit/>
-          </a:bodyPr>
+          <a:bodyPr/>
           <a:p/>
         </p:txBody>
       </p:sp>
@@ -5929,9 +5725,7 @@
           <a:ln/>
         </p:spPr>
         <p:txBody>
-          <a:bodyPr wrap="square" rtlCol="0" anchor="ctr">
-            <a:normAutofit/>
-          </a:bodyPr>
+          <a:bodyPr wrap="square" rtlCol="0" anchor="ctr"/>
           <a:lstStyle/>
           <a:p>
             <a:pPr algn="ctr" indent="0" marL="0">
@@ -5970,9 +5764,7 @@
           <a:ln/>
         </p:spPr>
         <p:txBody>
-          <a:bodyPr wrap="square" rtlCol="0" anchor="ctr">
-            <a:normAutofit/>
-          </a:bodyPr>
+          <a:bodyPr wrap="square" rtlCol="0" anchor="ctr"/>
           <a:lstStyle/>
           <a:p>
             <a:pPr indent="0" marL="0">
@@ -6011,9 +5803,7 @@
           <a:ln/>
         </p:spPr>
         <p:txBody>
-          <a:bodyPr wrap="square" rtlCol="0" anchor="ctr">
-            <a:normAutofit/>
-          </a:bodyPr>
+          <a:bodyPr wrap="square" rtlCol="0" anchor="ctr"/>
           <a:lstStyle/>
           <a:p>
             <a:pPr indent="0" marL="0">
@@ -6061,9 +5851,7 @@
           </a:ln>
         </p:spPr>
         <p:txBody>
-          <a:bodyPr wrap="square">
-            <a:normAutofit/>
-          </a:bodyPr>
+          <a:bodyPr/>
           <a:p/>
         </p:txBody>
       </p:sp>
@@ -6085,9 +5873,7 @@
           <a:ln/>
         </p:spPr>
         <p:txBody>
-          <a:bodyPr wrap="square" rtlCol="0" anchor="ctr">
-            <a:normAutofit/>
-          </a:bodyPr>
+          <a:bodyPr wrap="square" rtlCol="0" anchor="ctr"/>
           <a:lstStyle/>
           <a:p>
             <a:pPr indent="0" marL="0">
@@ -6126,9 +5912,7 @@
           <a:ln/>
         </p:spPr>
         <p:txBody>
-          <a:bodyPr wrap="square" rtlCol="0" anchor="ctr">
-            <a:normAutofit/>
-          </a:bodyPr>
+          <a:bodyPr wrap="square" rtlCol="0" anchor="ctr"/>
           <a:lstStyle/>
           <a:p>
             <a:pPr indent="0" marL="0">
@@ -6167,9 +5951,7 @@
           <a:ln/>
         </p:spPr>
         <p:txBody>
-          <a:bodyPr wrap="square" rtlCol="0" anchor="t">
-            <a:normAutofit/>
-          </a:bodyPr>
+          <a:bodyPr wrap="square" rtlCol="0" anchor="t"/>
           <a:lstStyle/>
           <a:p>
             <a:pPr indent="0" marL="0">
@@ -6208,9 +5990,7 @@
           <a:ln/>
         </p:spPr>
         <p:txBody>
-          <a:bodyPr wrap="square" rtlCol="0" anchor="ctr">
-            <a:normAutofit/>
-          </a:bodyPr>
+          <a:bodyPr wrap="square" rtlCol="0" anchor="ctr"/>
           <a:lstStyle/>
           <a:p>
             <a:pPr indent="0" marL="0">
@@ -6249,9 +6029,7 @@
           <a:ln/>
         </p:spPr>
         <p:txBody>
-          <a:bodyPr wrap="square" rtlCol="0" anchor="t">
-            <a:normAutofit/>
-          </a:bodyPr>
+          <a:bodyPr wrap="square" rtlCol="0" anchor="t"/>
           <a:lstStyle/>
           <a:p>
             <a:pPr indent="0" marL="0">
@@ -6290,9 +6068,7 @@
           <a:ln/>
         </p:spPr>
         <p:txBody>
-          <a:bodyPr wrap="square" rtlCol="0" anchor="ctr">
-            <a:normAutofit/>
-          </a:bodyPr>
+          <a:bodyPr wrap="square" rtlCol="0" anchor="ctr"/>
           <a:lstStyle/>
           <a:p>
             <a:pPr indent="0" marL="0">
@@ -6331,9 +6107,7 @@
           <a:ln/>
         </p:spPr>
         <p:txBody>
-          <a:bodyPr wrap="square" rtlCol="0" anchor="t">
-            <a:normAutofit/>
-          </a:bodyPr>
+          <a:bodyPr wrap="square" rtlCol="0" anchor="t"/>
           <a:lstStyle/>
           <a:p>
             <a:pPr indent="0" marL="0">
@@ -6381,9 +6155,7 @@
           </a:ln>
         </p:spPr>
         <p:txBody>
-          <a:bodyPr wrap="square">
-            <a:normAutofit/>
-          </a:bodyPr>
+          <a:bodyPr/>
           <a:p/>
         </p:txBody>
       </p:sp>
@@ -6405,9 +6177,7 @@
           <a:ln/>
         </p:spPr>
         <p:txBody>
-          <a:bodyPr wrap="square" rtlCol="0" anchor="ctr">
-            <a:normAutofit/>
-          </a:bodyPr>
+          <a:bodyPr wrap="square" rtlCol="0" anchor="ctr"/>
           <a:lstStyle/>
           <a:p>
             <a:pPr indent="0" marL="0">
@@ -6446,9 +6216,7 @@
           <a:ln/>
         </p:spPr>
         <p:txBody>
-          <a:bodyPr wrap="square" rtlCol="0" anchor="t">
-            <a:normAutofit/>
-          </a:bodyPr>
+          <a:bodyPr wrap="square" rtlCol="0" anchor="t"/>
           <a:lstStyle/>
           <a:p>
             <a:pPr indent="0" marL="0">
@@ -6487,9 +6255,7 @@
           <a:ln/>
         </p:spPr>
         <p:txBody>
-          <a:bodyPr wrap="square" rtlCol="0" anchor="t">
-            <a:normAutofit/>
-          </a:bodyPr>
+          <a:bodyPr wrap="square" rtlCol="0" anchor="t"/>
           <a:lstStyle/>
           <a:p>
             <a:pPr indent="0" marL="0">
@@ -6528,9 +6294,7 @@
           <a:ln/>
         </p:spPr>
         <p:txBody>
-          <a:bodyPr wrap="square" rtlCol="0" anchor="t">
-            <a:normAutofit/>
-          </a:bodyPr>
+          <a:bodyPr wrap="square" rtlCol="0" anchor="t"/>
           <a:lstStyle/>
           <a:p>
             <a:pPr indent="0" marL="0">
@@ -6569,9 +6333,7 @@
           <a:ln/>
         </p:spPr>
         <p:txBody>
-          <a:bodyPr wrap="square" rtlCol="0" anchor="ctr">
-            <a:normAutofit/>
-          </a:bodyPr>
+          <a:bodyPr wrap="square" rtlCol="0" anchor="ctr"/>
           <a:lstStyle/>
           <a:p>
             <a:pPr algn="r" indent="0" marL="0">
@@ -6642,9 +6404,7 @@
           </a:ln>
         </p:spPr>
         <p:txBody>
-          <a:bodyPr wrap="square">
-            <a:normAutofit/>
-          </a:bodyPr>
+          <a:bodyPr/>
           <a:p/>
         </p:txBody>
       </p:sp>
@@ -6673,9 +6433,7 @@
           </a:ln>
         </p:spPr>
         <p:txBody>
-          <a:bodyPr wrap="square">
-            <a:normAutofit/>
-          </a:bodyPr>
+          <a:bodyPr/>
           <a:p/>
         </p:txBody>
       </p:sp>
@@ -6706,9 +6464,7 @@
           </a:ln>
         </p:spPr>
         <p:txBody>
-          <a:bodyPr wrap="square">
-            <a:normAutofit/>
-          </a:bodyPr>
+          <a:bodyPr/>
           <a:p/>
         </p:txBody>
       </p:sp>
@@ -6730,9 +6486,7 @@
           <a:ln/>
         </p:spPr>
         <p:txBody>
-          <a:bodyPr wrap="square" rtlCol="0" anchor="ctr">
-            <a:normAutofit/>
-          </a:bodyPr>
+          <a:bodyPr wrap="square" rtlCol="0" anchor="ctr"/>
           <a:lstStyle/>
           <a:p>
             <a:pPr algn="ctr" indent="0" marL="0">
@@ -6771,9 +6525,7 @@
           <a:ln/>
         </p:spPr>
         <p:txBody>
-          <a:bodyPr wrap="square" rtlCol="0" anchor="ctr">
-            <a:normAutofit/>
-          </a:bodyPr>
+          <a:bodyPr wrap="square" rtlCol="0" anchor="ctr"/>
           <a:lstStyle/>
           <a:p>
             <a:pPr indent="0" marL="0">
@@ -6812,9 +6564,7 @@
           <a:ln/>
         </p:spPr>
         <p:txBody>
-          <a:bodyPr wrap="square" rtlCol="0" anchor="ctr">
-            <a:normAutofit/>
-          </a:bodyPr>
+          <a:bodyPr wrap="square" rtlCol="0" anchor="ctr"/>
           <a:lstStyle/>
           <a:p>
             <a:pPr indent="0" marL="0">
@@ -6862,9 +6612,7 @@
           </a:ln>
         </p:spPr>
         <p:txBody>
-          <a:bodyPr wrap="square">
-            <a:normAutofit/>
-          </a:bodyPr>
+          <a:bodyPr/>
           <a:p/>
         </p:txBody>
       </p:sp>
@@ -6886,9 +6634,7 @@
           <a:ln/>
         </p:spPr>
         <p:txBody>
-          <a:bodyPr wrap="square" rtlCol="0" anchor="ctr">
-            <a:normAutofit/>
-          </a:bodyPr>
+          <a:bodyPr wrap="square" rtlCol="0" anchor="ctr"/>
           <a:lstStyle/>
           <a:p>
             <a:pPr indent="0" marL="0">
@@ -6927,9 +6673,7 @@
           <a:ln/>
         </p:spPr>
         <p:txBody>
-          <a:bodyPr wrap="square" rtlCol="0" anchor="ctr">
-            <a:normAutofit/>
-          </a:bodyPr>
+          <a:bodyPr wrap="square" rtlCol="0" anchor="ctr"/>
           <a:lstStyle/>
           <a:p>
             <a:pPr indent="0" marL="0">
@@ -6968,9 +6712,7 @@
           <a:ln/>
         </p:spPr>
         <p:txBody>
-          <a:bodyPr wrap="square" rtlCol="0" anchor="t">
-            <a:normAutofit/>
-          </a:bodyPr>
+          <a:bodyPr wrap="square" rtlCol="0" anchor="t"/>
           <a:lstStyle/>
           <a:p>
             <a:pPr indent="0" marL="0">
@@ -7009,9 +6751,7 @@
           <a:ln/>
         </p:spPr>
         <p:txBody>
-          <a:bodyPr wrap="square" rtlCol="0" anchor="ctr">
-            <a:normAutofit/>
-          </a:bodyPr>
+          <a:bodyPr wrap="square" rtlCol="0" anchor="ctr"/>
           <a:lstStyle/>
           <a:p>
             <a:pPr indent="0" marL="0">
@@ -7050,9 +6790,7 @@
           <a:ln/>
         </p:spPr>
         <p:txBody>
-          <a:bodyPr wrap="square" rtlCol="0" anchor="t">
-            <a:normAutofit/>
-          </a:bodyPr>
+          <a:bodyPr wrap="square" rtlCol="0" anchor="t"/>
           <a:lstStyle/>
           <a:p>
             <a:pPr indent="0" marL="0">
@@ -7091,9 +6829,7 @@
           <a:ln/>
         </p:spPr>
         <p:txBody>
-          <a:bodyPr wrap="square" rtlCol="0" anchor="ctr">
-            <a:normAutofit/>
-          </a:bodyPr>
+          <a:bodyPr wrap="square" rtlCol="0" anchor="ctr"/>
           <a:lstStyle/>
           <a:p>
             <a:pPr indent="0" marL="0">
@@ -7132,9 +6868,7 @@
           <a:ln/>
         </p:spPr>
         <p:txBody>
-          <a:bodyPr wrap="square" rtlCol="0" anchor="t">
-            <a:normAutofit/>
-          </a:bodyPr>
+          <a:bodyPr wrap="square" rtlCol="0" anchor="t"/>
           <a:lstStyle/>
           <a:p>
             <a:pPr indent="0" marL="0">
@@ -7182,9 +6916,7 @@
           </a:ln>
         </p:spPr>
         <p:txBody>
-          <a:bodyPr wrap="square">
-            <a:normAutofit/>
-          </a:bodyPr>
+          <a:bodyPr/>
           <a:p/>
         </p:txBody>
       </p:sp>
@@ -7206,9 +6938,7 @@
           <a:ln/>
         </p:spPr>
         <p:txBody>
-          <a:bodyPr wrap="square" rtlCol="0" anchor="ctr">
-            <a:normAutofit/>
-          </a:bodyPr>
+          <a:bodyPr wrap="square" rtlCol="0" anchor="ctr"/>
           <a:lstStyle/>
           <a:p>
             <a:pPr indent="0" marL="0">
@@ -7247,9 +6977,7 @@
           <a:ln/>
         </p:spPr>
         <p:txBody>
-          <a:bodyPr wrap="square" rtlCol="0" anchor="t">
-            <a:normAutofit/>
-          </a:bodyPr>
+          <a:bodyPr wrap="square" rtlCol="0" anchor="t"/>
           <a:lstStyle/>
           <a:p>
             <a:pPr indent="0" marL="0">
@@ -7288,9 +7016,7 @@
           <a:ln/>
         </p:spPr>
         <p:txBody>
-          <a:bodyPr wrap="square" rtlCol="0" anchor="t">
-            <a:normAutofit/>
-          </a:bodyPr>
+          <a:bodyPr wrap="square" rtlCol="0" anchor="t"/>
           <a:lstStyle/>
           <a:p>
             <a:pPr indent="0" marL="0">
@@ -7329,9 +7055,7 @@
           <a:ln/>
         </p:spPr>
         <p:txBody>
-          <a:bodyPr wrap="square" rtlCol="0" anchor="t">
-            <a:normAutofit/>
-          </a:bodyPr>
+          <a:bodyPr wrap="square" rtlCol="0" anchor="t"/>
           <a:lstStyle/>
           <a:p>
             <a:pPr indent="0" marL="0">
@@ -7370,9 +7094,7 @@
           <a:ln/>
         </p:spPr>
         <p:txBody>
-          <a:bodyPr wrap="square" rtlCol="0" anchor="ctr">
-            <a:normAutofit/>
-          </a:bodyPr>
+          <a:bodyPr wrap="square" rtlCol="0" anchor="ctr"/>
           <a:lstStyle/>
           <a:p>
             <a:pPr algn="r" indent="0" marL="0">
